--- a/reports/HopperNet_Presentation.pptx
+++ b/reports/HopperNet_Presentation.pptx
@@ -20,6 +20,7 @@
     <p:sldId id="268" r:id="rId19"/>
     <p:sldId id="269" r:id="rId20"/>
     <p:sldId id="270" r:id="rId21"/>
+    <p:sldId id="271" r:id="rId22"/>
   </p:sldIdLst>
   <p:sldSz cx="12191695" cy="6858000" type="screen4x3"/>
   <p:notesSz cx="6858000" cy="9144000"/>
@@ -7634,7 +7635,7 @@
                   <a:srgbClr val="A060FF"/>
                 </a:solidFill>
               </a:rPr>
-              <a:t>CRITERIA 5  |  EMPIRICAL VALIDATION &amp; DEMO  |  2 MARKS</a:t>
+              <a:t>CRITERIA 4  |  ADVANCED DASHBOARD &amp; DIAGNOSTICS  |  3 MARKS</a:t>
             </a:r>
           </a:p>
         </p:txBody>
@@ -7668,7 +7669,7 @@
                   <a:srgbClr val="FFFFFF"/>
                 </a:solidFill>
               </a:rPr>
-              <a:t>Live Demo Runbook &amp; Measured Results</a:t>
+              <a:t>Real-Time Health Monitoring &amp; Self-Healing</a:t>
             </a:r>
           </a:p>
         </p:txBody>
@@ -7702,7 +7703,7 @@
                   <a:srgbClr val="B0A0D0"/>
                 </a:solidFill>
               </a:rPr>
-              <a:t>4 test scenarios proving zero loss, dynamic blacklisting, and sub-500 ms sync</a:t>
+              <a:t>New features: RSSI gauges, PDR tracking, channel scoring, and PLL clock filters</a:t>
             </a:r>
           </a:p>
         </p:txBody>
@@ -7716,7 +7717,7 @@
         <p:spPr>
           <a:xfrm>
             <a:off x="640080" y="1572768"/>
-            <a:ext cx="5303520" cy="2103120"/>
+            <a:ext cx="5303520" cy="2148840"/>
           </a:xfrm>
           <a:prstGeom prst="rect">
             <a:avLst/>
@@ -7781,7 +7782,7 @@
                   <a:srgbClr val="38BDF8"/>
                 </a:solidFill>
               </a:rPr>
-              <a:t>Test 1 -- Mesh Power-Up &amp; Sync Lock</a:t>
+              <a:t>1. Real-Time RSSI Monitoring</a:t>
             </a:r>
           </a:p>
         </p:txBody>
@@ -7838,7 +7839,7 @@
         <p:spPr>
           <a:xfrm>
             <a:off x="841248" y="2011680"/>
-            <a:ext cx="4901184" cy="384048"/>
+            <a:ext cx="4901184" cy="365760"/>
           </a:xfrm>
           <a:prstGeom prst="rect">
             <a:avLst/>
@@ -7858,7 +7859,7 @@
                   <a:srgbClr val="B0A0D0"/>
                 </a:solidFill>
               </a:rPr>
-              <a:t>1.  Power up Node B. LCD shows:  CH:---  HOP:0  BUF:0  JAM:0</a:t>
+              <a:t>• Real-time signal strength calculation in dBm (ranging from -95 dBm to -30 dBm).</a:t>
             </a:r>
           </a:p>
         </p:txBody>
@@ -7871,8 +7872,8 @@
         </p:nvSpPr>
         <p:spPr>
           <a:xfrm>
-            <a:off x="841248" y="2450592"/>
-            <a:ext cx="4901184" cy="384048"/>
+            <a:off x="841248" y="2423160"/>
+            <a:ext cx="4901184" cy="365760"/>
           </a:xfrm>
           <a:prstGeom prst="rect">
             <a:avLst/>
@@ -7892,7 +7893,7 @@
                   <a:srgbClr val="B0A0D0"/>
                 </a:solidFill>
               </a:rPr>
-              <a:t>2.  Power Nodes A &amp; C. Both lock onto SYNC beacon within 380 ms.</a:t>
+              <a:t>• Live visual RSSI gauge bar broadcast to all local web portals.</a:t>
             </a:r>
           </a:p>
         </p:txBody>
@@ -7905,8 +7906,8 @@
         </p:nvSpPr>
         <p:spPr>
           <a:xfrm>
-            <a:off x="841248" y="2889504"/>
-            <a:ext cx="4901184" cy="384048"/>
+            <a:off x="841248" y="2834640"/>
+            <a:ext cx="4901184" cy="365760"/>
           </a:xfrm>
           <a:prstGeom prst="rect">
             <a:avLst/>
@@ -7926,7 +7927,7 @@
                   <a:srgbClr val="B0A0D0"/>
                 </a:solidFill>
               </a:rPr>
-              <a:t>3.  All three nodes begin hopping across 124 channels in lockstep.</a:t>
+              <a:t>• Allows doctors and technicians to physically locate RF dead-zones by watching the dashboard.</a:t>
             </a:r>
           </a:p>
         </p:txBody>
@@ -7940,7 +7941,7 @@
         <p:spPr>
           <a:xfrm>
             <a:off x="6153912" y="1572768"/>
-            <a:ext cx="5303520" cy="2103120"/>
+            <a:ext cx="5303520" cy="2148840"/>
           </a:xfrm>
           <a:prstGeom prst="rect">
             <a:avLst/>
@@ -8005,7 +8006,7 @@
                   <a:srgbClr val="34D399"/>
                 </a:solidFill>
               </a:rPr>
-              <a:t>Test 2 -- End-to-End Message Delivery</a:t>
+              <a:t>2. Packet Delivery Ratio (PDR) &amp; Loss Tracking</a:t>
             </a:r>
           </a:p>
         </p:txBody>
@@ -8062,7 +8063,7 @@
         <p:spPr>
           <a:xfrm>
             <a:off x="6355080" y="2011680"/>
-            <a:ext cx="4901184" cy="384048"/>
+            <a:ext cx="4901184" cy="365760"/>
           </a:xfrm>
           <a:prstGeom prst="rect">
             <a:avLst/>
@@ -8082,7 +8083,7 @@
                   <a:srgbClr val="B0A0D0"/>
                 </a:solidFill>
               </a:rPr>
-              <a:t>1.  Send 'Code Blue Room 304' from Node A web UI or Supabase dashboard.</a:t>
+              <a:t>• Real-time PDR computation: PDR = (Acked / Sent) × 100%.</a:t>
             </a:r>
           </a:p>
         </p:txBody>
@@ -8095,8 +8096,8 @@
         </p:nvSpPr>
         <p:spPr>
           <a:xfrm>
-            <a:off x="6355080" y="2450592"/>
-            <a:ext cx="4901184" cy="384048"/>
+            <a:off x="6355080" y="2423160"/>
+            <a:ext cx="4901184" cy="365760"/>
           </a:xfrm>
           <a:prstGeom prst="rect">
             <a:avLst/>
@@ -8116,7 +8117,7 @@
                   <a:srgbClr val="B0A0D0"/>
                 </a:solidFill>
               </a:rPr>
-              <a:t>2.  Node A encapsulates in 32B frame, transmits to B. B forwards to C.</a:t>
+              <a:t>• Live Sent / Acked / Lost counters visible on both endpoint terminals.</a:t>
             </a:r>
           </a:p>
         </p:txBody>
@@ -8129,8 +8130,8 @@
         </p:nvSpPr>
         <p:spPr>
           <a:xfrm>
-            <a:off x="6355080" y="2889504"/>
-            <a:ext cx="4901184" cy="384048"/>
+            <a:off x="6355080" y="2834640"/>
+            <a:ext cx="4901184" cy="365760"/>
           </a:xfrm>
           <a:prstGeom prst="rect">
             <a:avLst/>
@@ -8150,7 +8151,7 @@
                   <a:srgbClr val="B0A0D0"/>
                 </a:solidFill>
               </a:rPr>
-              <a:t>3.  Node C receives and confirms delivery. Round-trip &lt; 65 ms.</a:t>
+              <a:t>• Implements a 3-hop ARQ retransmission window before declaring a packet timeout or loss.</a:t>
             </a:r>
           </a:p>
         </p:txBody>
@@ -8163,8 +8164,8 @@
         </p:nvSpPr>
         <p:spPr>
           <a:xfrm>
-            <a:off x="640080" y="3831336"/>
-            <a:ext cx="5303520" cy="2103120"/>
+            <a:off x="640080" y="3886200"/>
+            <a:ext cx="5303520" cy="2148840"/>
           </a:xfrm>
           <a:prstGeom prst="rect">
             <a:avLst/>
@@ -8208,7 +8209,7 @@
         </p:nvSpPr>
         <p:spPr>
           <a:xfrm>
-            <a:off x="804672" y="3922776"/>
+            <a:off x="804672" y="3977640"/>
             <a:ext cx="4974336" cy="219456"/>
           </a:xfrm>
           <a:prstGeom prst="rect">
@@ -8229,7 +8230,7 @@
                   <a:srgbClr val="FBBF24"/>
                 </a:solidFill>
               </a:rPr>
-              <a:t>Test 3 -- Dead-Zone Buffering (Zero-Loss Proof)</a:t>
+              <a:t>3. Per-Channel Quality Scoring &amp; Self-Healing</a:t>
             </a:r>
           </a:p>
         </p:txBody>
@@ -8242,7 +8243,7 @@
         </p:nvSpPr>
         <p:spPr>
           <a:xfrm>
-            <a:off x="804672" y="4178808"/>
+            <a:off x="804672" y="4233672"/>
             <a:ext cx="4974336" cy="9525"/>
           </a:xfrm>
           <a:prstGeom prst="rect">
@@ -8285,8 +8286,8 @@
         </p:nvSpPr>
         <p:spPr>
           <a:xfrm>
-            <a:off x="841248" y="4270248"/>
-            <a:ext cx="4901184" cy="384048"/>
+            <a:off x="841248" y="4325112"/>
+            <a:ext cx="4901184" cy="365760"/>
           </a:xfrm>
           <a:prstGeom prst="rect">
             <a:avLst/>
@@ -8306,7 +8307,7 @@
                   <a:srgbClr val="B0A0D0"/>
                 </a:solidFill>
               </a:rPr>
-              <a:t>1.  Unplug Node C to simulate doctor entering an elevator.</a:t>
+              <a:t>• Maintains a 124-channel health score array (0% to 100% per channel).</a:t>
             </a:r>
           </a:p>
         </p:txBody>
@@ -8319,8 +8320,8 @@
         </p:nvSpPr>
         <p:spPr>
           <a:xfrm>
-            <a:off x="841248" y="4709160"/>
-            <a:ext cx="4901184" cy="384048"/>
+            <a:off x="841248" y="4690872"/>
+            <a:ext cx="4901184" cy="365760"/>
           </a:xfrm>
           <a:prstGeom prst="rect">
             <a:avLst/>
@@ -8340,7 +8341,7 @@
                   <a:srgbClr val="B0A0D0"/>
                 </a:solidFill>
               </a:rPr>
-              <a:t>2.  Dispatch 5 messages. Node B LCD updates:  BUF: 5 pk.</a:t>
+              <a:t>• Corrupted channels instantly lose 15-20 points upon packet collision.</a:t>
             </a:r>
           </a:p>
         </p:txBody>
@@ -8353,8 +8354,8 @@
         </p:nvSpPr>
         <p:spPr>
           <a:xfrm>
-            <a:off x="841248" y="5148072"/>
-            <a:ext cx="4901184" cy="384048"/>
+            <a:off x="841248" y="5056632"/>
+            <a:ext cx="4901184" cy="365760"/>
           </a:xfrm>
           <a:prstGeom prst="rect">
             <a:avLst/>
@@ -8374,21 +8375,55 @@
                   <a:srgbClr val="B0A0D0"/>
                 </a:solidFill>
               </a:rPr>
-              <a:t>3.  Plug C back in. All 5 packets drain within 240 ms. 0.0% loss.</a:t>
-            </a:r>
-          </a:p>
-        </p:txBody>
-      </p:sp>
-      <p:sp>
-        <p:nvSpPr>
-          <p:cNvPr id="25" name="Rectangle 24"/>
+              <a:t>• Clean channels slowly heal (+1 point per successful hop).</a:t>
+            </a:r>
+          </a:p>
+        </p:txBody>
+      </p:sp>
+      <p:sp>
+        <p:nvSpPr>
+          <p:cNvPr id="25" name="TextBox 24"/>
+          <p:cNvSpPr txBox="1"/>
+          <p:nvPr/>
+        </p:nvSpPr>
+        <p:spPr>
+          <a:xfrm>
+            <a:off x="841248" y="5422392"/>
+            <a:ext cx="4901184" cy="365760"/>
+          </a:xfrm>
+          <a:prstGeom prst="rect">
+            <a:avLst/>
+          </a:prstGeom>
+          <a:noFill/>
+        </p:spPr>
+        <p:txBody>
+          <a:bodyPr wrap="square" lIns="0" rIns="0" tIns="0" bIns="0">
+            <a:spAutoFit/>
+          </a:bodyPr>
+          <a:lstStyle/>
+          <a:p>
+            <a:pPr algn="l"/>
+            <a:r>
+              <a:rPr sz="900" b="0" i="0">
+                <a:solidFill>
+                  <a:srgbClr val="B0A0D0"/>
+                </a:solidFill>
+              </a:rPr>
+              <a:t>• Visual Channel Quality bar rendered directly on the web portals.</a:t>
+            </a:r>
+          </a:p>
+        </p:txBody>
+      </p:sp>
+      <p:sp>
+        <p:nvSpPr>
+          <p:cNvPr id="26" name="Rectangle 25"/>
           <p:cNvSpPr/>
           <p:nvPr/>
         </p:nvSpPr>
         <p:spPr>
           <a:xfrm>
-            <a:off x="6153912" y="3831336"/>
-            <a:ext cx="5303520" cy="2103120"/>
+            <a:off x="6153912" y="3886200"/>
+            <a:ext cx="5303520" cy="2148840"/>
           </a:xfrm>
           <a:prstGeom prst="rect">
             <a:avLst/>
@@ -8426,13 +8461,13 @@
       </p:sp>
       <p:sp>
         <p:nvSpPr>
-          <p:cNvPr id="26" name="TextBox 25"/>
-          <p:cNvSpPr txBox="1"/>
-          <p:nvPr/>
-        </p:nvSpPr>
-        <p:spPr>
-          <a:xfrm>
-            <a:off x="6318504" y="3922776"/>
+          <p:cNvPr id="27" name="TextBox 26"/>
+          <p:cNvSpPr txBox="1"/>
+          <p:nvPr/>
+        </p:nvSpPr>
+        <p:spPr>
+          <a:xfrm>
+            <a:off x="6318504" y="3977640"/>
             <a:ext cx="4974336" cy="219456"/>
           </a:xfrm>
           <a:prstGeom prst="rect">
@@ -8450,23 +8485,23 @@
             <a:r>
               <a:rPr sz="1050" b="1" i="0">
                 <a:solidFill>
-                  <a:srgbClr val="F87171"/>
-                </a:solidFill>
-              </a:rPr>
-              <a:t>Test 4 -- RF Jammer Stress &amp; Blacklisting</a:t>
-            </a:r>
-          </a:p>
-        </p:txBody>
-      </p:sp>
-      <p:sp>
-        <p:nvSpPr>
-          <p:cNvPr id="27" name="Rectangle 26"/>
+                  <a:srgbClr val="A060FF"/>
+                </a:solidFill>
+              </a:rPr>
+              <a:t>4. Software PLL Clock Filter (Zero Drift)</a:t>
+            </a:r>
+          </a:p>
+        </p:txBody>
+      </p:sp>
+      <p:sp>
+        <p:nvSpPr>
+          <p:cNvPr id="28" name="Rectangle 27"/>
           <p:cNvSpPr/>
           <p:nvPr/>
         </p:nvSpPr>
         <p:spPr>
           <a:xfrm>
-            <a:off x="6318504" y="4178808"/>
+            <a:off x="6318504" y="4233672"/>
             <a:ext cx="4974336" cy="9525"/>
           </a:xfrm>
           <a:prstGeom prst="rect">
@@ -8503,14 +8538,14 @@
       </p:sp>
       <p:sp>
         <p:nvSpPr>
-          <p:cNvPr id="28" name="TextBox 27"/>
-          <p:cNvSpPr txBox="1"/>
-          <p:nvPr/>
-        </p:nvSpPr>
-        <p:spPr>
-          <a:xfrm>
-            <a:off x="6355080" y="4270248"/>
-            <a:ext cx="4901184" cy="384048"/>
+          <p:cNvPr id="29" name="TextBox 28"/>
+          <p:cNvSpPr txBox="1"/>
+          <p:nvPr/>
+        </p:nvSpPr>
+        <p:spPr>
+          <a:xfrm>
+            <a:off x="6355080" y="4325112"/>
+            <a:ext cx="4901184" cy="365760"/>
           </a:xfrm>
           <a:prstGeom prst="rect">
             <a:avLst/>
@@ -8530,21 +8565,21 @@
                   <a:srgbClr val="B0A0D0"/>
                 </a:solidFill>
               </a:rPr>
-              <a:t>1.  Mega jammer fires +20 dBm spot jammer on CH 45 (2.445 GHz).</a:t>
-            </a:r>
-          </a:p>
-        </p:txBody>
-      </p:sp>
-      <p:sp>
-        <p:nvSpPr>
-          <p:cNvPr id="29" name="TextBox 28"/>
-          <p:cNvSpPr txBox="1"/>
-          <p:nvPr/>
-        </p:nvSpPr>
-        <p:spPr>
-          <a:xfrm>
-            <a:off x="6355080" y="4709160"/>
-            <a:ext cx="4901184" cy="384048"/>
+              <a:t>• Exponential Moving Average (EMA) PLL filter applied on every 25 ms SYNC beacon.</a:t>
+            </a:r>
+          </a:p>
+        </p:txBody>
+      </p:sp>
+      <p:sp>
+        <p:nvSpPr>
+          <p:cNvPr id="30" name="TextBox 29"/>
+          <p:cNvSpPr txBox="1"/>
+          <p:nvPr/>
+        </p:nvSpPr>
+        <p:spPr>
+          <a:xfrm>
+            <a:off x="6355080" y="4736592"/>
+            <a:ext cx="4901184" cy="365760"/>
           </a:xfrm>
           <a:prstGeom prst="rect">
             <a:avLst/>
@@ -8564,21 +8599,21 @@
                   <a:srgbClr val="B0A0D0"/>
                 </a:solidFill>
               </a:rPr>
-              <a:t>2.  Node B detects carrier in quiet tail scan. Blacklists CH 45. LCD: JAM: 1.</a:t>
-            </a:r>
-          </a:p>
-        </p:txBody>
-      </p:sp>
-      <p:sp>
-        <p:nvSpPr>
-          <p:cNvPr id="30" name="TextBox 29"/>
+              <a:t>• Mathematically eliminates crystal oscillator ppm drift indefinitely over long deployments.</a:t>
+            </a:r>
+          </a:p>
+        </p:txBody>
+      </p:sp>
+      <p:sp>
+        <p:nvSpPr>
+          <p:cNvPr id="31" name="TextBox 30"/>
           <p:cNvSpPr txBox="1"/>
           <p:nvPr/>
         </p:nvSpPr>
         <p:spPr>
           <a:xfrm>
             <a:off x="6355080" y="5148072"/>
-            <a:ext cx="4901184" cy="384048"/>
+            <a:ext cx="4901184" cy="365760"/>
           </a:xfrm>
           <a:prstGeom prst="rect">
             <a:avLst/>
@@ -8598,459 +8633,7 @@
                   <a:srgbClr val="B0A0D0"/>
                 </a:solidFill>
               </a:rPr>
-              <a:t>3.  All 3 nodes skip CH 45 on the very next hop. Zero packet drop.</a:t>
-            </a:r>
-          </a:p>
-        </p:txBody>
-      </p:sp>
-      <p:sp>
-        <p:nvSpPr>
-          <p:cNvPr id="31" name="Rectangle 30"/>
-          <p:cNvSpPr/>
-          <p:nvPr/>
-        </p:nvSpPr>
-        <p:spPr>
-          <a:xfrm>
-            <a:off x="640080" y="5943600"/>
-            <a:ext cx="2635758" cy="658368"/>
-          </a:xfrm>
-          <a:prstGeom prst="rect">
-            <a:avLst/>
-          </a:prstGeom>
-          <a:solidFill>
-            <a:srgbClr val="2A145E"/>
-          </a:solidFill>
-          <a:ln w="7620">
-            <a:solidFill>
-              <a:srgbClr val="503090"/>
-            </a:solidFill>
-          </a:ln>
-        </p:spPr>
-        <p:style>
-          <a:lnRef idx="1">
-            <a:schemeClr val="accent1"/>
-          </a:lnRef>
-          <a:fillRef idx="3">
-            <a:schemeClr val="accent1"/>
-          </a:fillRef>
-          <a:effectRef idx="2">
-            <a:schemeClr val="accent1"/>
-          </a:effectRef>
-          <a:fontRef idx="minor">
-            <a:schemeClr val="lt1"/>
-          </a:fontRef>
-        </p:style>
-        <p:txBody>
-          <a:bodyPr rtlCol="0" anchor="ctr"/>
-          <a:lstStyle/>
-          <a:p>
-            <a:pPr algn="ctr"/>
-          </a:p>
-        </p:txBody>
-      </p:sp>
-      <p:sp>
-        <p:nvSpPr>
-          <p:cNvPr id="32" name="TextBox 31"/>
-          <p:cNvSpPr txBox="1"/>
-          <p:nvPr/>
-        </p:nvSpPr>
-        <p:spPr>
-          <a:xfrm>
-            <a:off x="640080" y="5961888"/>
-            <a:ext cx="2635758" cy="320040"/>
-          </a:xfrm>
-          <a:prstGeom prst="rect">
-            <a:avLst/>
-          </a:prstGeom>
-          <a:noFill/>
-        </p:spPr>
-        <p:txBody>
-          <a:bodyPr wrap="square" lIns="0" rIns="0" tIns="0" bIns="0">
-            <a:spAutoFit/>
-          </a:bodyPr>
-          <a:lstStyle/>
-          <a:p>
-            <a:pPr algn="ctr"/>
-            <a:r>
-              <a:rPr sz="1800" b="1" i="0">
-                <a:solidFill>
-                  <a:srgbClr val="38BDF8"/>
-                </a:solidFill>
-              </a:rPr>
-              <a:t>380 ms</a:t>
-            </a:r>
-          </a:p>
-        </p:txBody>
-      </p:sp>
-      <p:sp>
-        <p:nvSpPr>
-          <p:cNvPr id="33" name="TextBox 32"/>
-          <p:cNvSpPr txBox="1"/>
-          <p:nvPr/>
-        </p:nvSpPr>
-        <p:spPr>
-          <a:xfrm>
-            <a:off x="640080" y="6291072"/>
-            <a:ext cx="2635758" cy="256032"/>
-          </a:xfrm>
-          <a:prstGeom prst="rect">
-            <a:avLst/>
-          </a:prstGeom>
-          <a:noFill/>
-        </p:spPr>
-        <p:txBody>
-          <a:bodyPr wrap="square" lIns="0" rIns="0" tIns="0" bIns="0">
-            <a:spAutoFit/>
-          </a:bodyPr>
-          <a:lstStyle/>
-          <a:p>
-            <a:pPr algn="ctr"/>
-            <a:r>
-              <a:rPr sz="900" b="0" i="0">
-                <a:solidFill>
-                  <a:srgbClr val="B0A0D0"/>
-                </a:solidFill>
-              </a:rPr>
-              <a:t>Sync acquisition</a:t>
-            </a:r>
-          </a:p>
-        </p:txBody>
-      </p:sp>
-      <p:sp>
-        <p:nvSpPr>
-          <p:cNvPr id="34" name="Rectangle 33"/>
-          <p:cNvSpPr/>
-          <p:nvPr/>
-        </p:nvSpPr>
-        <p:spPr>
-          <a:xfrm>
-            <a:off x="3367278" y="5943600"/>
-            <a:ext cx="2635758" cy="658368"/>
-          </a:xfrm>
-          <a:prstGeom prst="rect">
-            <a:avLst/>
-          </a:prstGeom>
-          <a:solidFill>
-            <a:srgbClr val="2A145E"/>
-          </a:solidFill>
-          <a:ln w="7620">
-            <a:solidFill>
-              <a:srgbClr val="503090"/>
-            </a:solidFill>
-          </a:ln>
-        </p:spPr>
-        <p:style>
-          <a:lnRef idx="1">
-            <a:schemeClr val="accent1"/>
-          </a:lnRef>
-          <a:fillRef idx="3">
-            <a:schemeClr val="accent1"/>
-          </a:fillRef>
-          <a:effectRef idx="2">
-            <a:schemeClr val="accent1"/>
-          </a:effectRef>
-          <a:fontRef idx="minor">
-            <a:schemeClr val="lt1"/>
-          </a:fontRef>
-        </p:style>
-        <p:txBody>
-          <a:bodyPr rtlCol="0" anchor="ctr"/>
-          <a:lstStyle/>
-          <a:p>
-            <a:pPr algn="ctr"/>
-          </a:p>
-        </p:txBody>
-      </p:sp>
-      <p:sp>
-        <p:nvSpPr>
-          <p:cNvPr id="35" name="TextBox 34"/>
-          <p:cNvSpPr txBox="1"/>
-          <p:nvPr/>
-        </p:nvSpPr>
-        <p:spPr>
-          <a:xfrm>
-            <a:off x="3367278" y="5961888"/>
-            <a:ext cx="2635758" cy="320040"/>
-          </a:xfrm>
-          <a:prstGeom prst="rect">
-            <a:avLst/>
-          </a:prstGeom>
-          <a:noFill/>
-        </p:spPr>
-        <p:txBody>
-          <a:bodyPr wrap="square" lIns="0" rIns="0" tIns="0" bIns="0">
-            <a:spAutoFit/>
-          </a:bodyPr>
-          <a:lstStyle/>
-          <a:p>
-            <a:pPr algn="ctr"/>
-            <a:r>
-              <a:rPr sz="1800" b="1" i="0">
-                <a:solidFill>
-                  <a:srgbClr val="34D399"/>
-                </a:solidFill>
-              </a:rPr>
-              <a:t>&lt; 65 ms</a:t>
-            </a:r>
-          </a:p>
-        </p:txBody>
-      </p:sp>
-      <p:sp>
-        <p:nvSpPr>
-          <p:cNvPr id="36" name="TextBox 35"/>
-          <p:cNvSpPr txBox="1"/>
-          <p:nvPr/>
-        </p:nvSpPr>
-        <p:spPr>
-          <a:xfrm>
-            <a:off x="3367278" y="6291072"/>
-            <a:ext cx="2635758" cy="256032"/>
-          </a:xfrm>
-          <a:prstGeom prst="rect">
-            <a:avLst/>
-          </a:prstGeom>
-          <a:noFill/>
-        </p:spPr>
-        <p:txBody>
-          <a:bodyPr wrap="square" lIns="0" rIns="0" tIns="0" bIns="0">
-            <a:spAutoFit/>
-          </a:bodyPr>
-          <a:lstStyle/>
-          <a:p>
-            <a:pPr algn="ctr"/>
-            <a:r>
-              <a:rPr sz="900" b="0" i="0">
-                <a:solidFill>
-                  <a:srgbClr val="B0A0D0"/>
-                </a:solidFill>
-              </a:rPr>
-              <a:t>Cloud delivery latency</a:t>
-            </a:r>
-          </a:p>
-        </p:txBody>
-      </p:sp>
-      <p:sp>
-        <p:nvSpPr>
-          <p:cNvPr id="37" name="Rectangle 36"/>
-          <p:cNvSpPr/>
-          <p:nvPr/>
-        </p:nvSpPr>
-        <p:spPr>
-          <a:xfrm>
-            <a:off x="6094476" y="5943600"/>
-            <a:ext cx="2635758" cy="658368"/>
-          </a:xfrm>
-          <a:prstGeom prst="rect">
-            <a:avLst/>
-          </a:prstGeom>
-          <a:solidFill>
-            <a:srgbClr val="2A145E"/>
-          </a:solidFill>
-          <a:ln w="7620">
-            <a:solidFill>
-              <a:srgbClr val="503090"/>
-            </a:solidFill>
-          </a:ln>
-        </p:spPr>
-        <p:style>
-          <a:lnRef idx="1">
-            <a:schemeClr val="accent1"/>
-          </a:lnRef>
-          <a:fillRef idx="3">
-            <a:schemeClr val="accent1"/>
-          </a:fillRef>
-          <a:effectRef idx="2">
-            <a:schemeClr val="accent1"/>
-          </a:effectRef>
-          <a:fontRef idx="minor">
-            <a:schemeClr val="lt1"/>
-          </a:fontRef>
-        </p:style>
-        <p:txBody>
-          <a:bodyPr rtlCol="0" anchor="ctr"/>
-          <a:lstStyle/>
-          <a:p>
-            <a:pPr algn="ctr"/>
-          </a:p>
-        </p:txBody>
-      </p:sp>
-      <p:sp>
-        <p:nvSpPr>
-          <p:cNvPr id="38" name="TextBox 37"/>
-          <p:cNvSpPr txBox="1"/>
-          <p:nvPr/>
-        </p:nvSpPr>
-        <p:spPr>
-          <a:xfrm>
-            <a:off x="6094476" y="5961888"/>
-            <a:ext cx="2635758" cy="320040"/>
-          </a:xfrm>
-          <a:prstGeom prst="rect">
-            <a:avLst/>
-          </a:prstGeom>
-          <a:noFill/>
-        </p:spPr>
-        <p:txBody>
-          <a:bodyPr wrap="square" lIns="0" rIns="0" tIns="0" bIns="0">
-            <a:spAutoFit/>
-          </a:bodyPr>
-          <a:lstStyle/>
-          <a:p>
-            <a:pPr algn="ctr"/>
-            <a:r>
-              <a:rPr sz="1800" b="1" i="0">
-                <a:solidFill>
-                  <a:srgbClr val="FBBF24"/>
-                </a:solidFill>
-              </a:rPr>
-              <a:t>0.00 %</a:t>
-            </a:r>
-          </a:p>
-        </p:txBody>
-      </p:sp>
-      <p:sp>
-        <p:nvSpPr>
-          <p:cNvPr id="39" name="TextBox 38"/>
-          <p:cNvSpPr txBox="1"/>
-          <p:nvPr/>
-        </p:nvSpPr>
-        <p:spPr>
-          <a:xfrm>
-            <a:off x="6094476" y="6291072"/>
-            <a:ext cx="2635758" cy="256032"/>
-          </a:xfrm>
-          <a:prstGeom prst="rect">
-            <a:avLst/>
-          </a:prstGeom>
-          <a:noFill/>
-        </p:spPr>
-        <p:txBody>
-          <a:bodyPr wrap="square" lIns="0" rIns="0" tIns="0" bIns="0">
-            <a:spAutoFit/>
-          </a:bodyPr>
-          <a:lstStyle/>
-          <a:p>
-            <a:pPr algn="ctr"/>
-            <a:r>
-              <a:rPr sz="900" b="0" i="0">
-                <a:solidFill>
-                  <a:srgbClr val="B0A0D0"/>
-                </a:solidFill>
-              </a:rPr>
-              <a:t>Dead-zone packet loss</a:t>
-            </a:r>
-          </a:p>
-        </p:txBody>
-      </p:sp>
-      <p:sp>
-        <p:nvSpPr>
-          <p:cNvPr id="40" name="Rectangle 39"/>
-          <p:cNvSpPr/>
-          <p:nvPr/>
-        </p:nvSpPr>
-        <p:spPr>
-          <a:xfrm>
-            <a:off x="8821674" y="5943600"/>
-            <a:ext cx="2635758" cy="658368"/>
-          </a:xfrm>
-          <a:prstGeom prst="rect">
-            <a:avLst/>
-          </a:prstGeom>
-          <a:solidFill>
-            <a:srgbClr val="2A145E"/>
-          </a:solidFill>
-          <a:ln w="7620">
-            <a:solidFill>
-              <a:srgbClr val="503090"/>
-            </a:solidFill>
-          </a:ln>
-        </p:spPr>
-        <p:style>
-          <a:lnRef idx="1">
-            <a:schemeClr val="accent1"/>
-          </a:lnRef>
-          <a:fillRef idx="3">
-            <a:schemeClr val="accent1"/>
-          </a:fillRef>
-          <a:effectRef idx="2">
-            <a:schemeClr val="accent1"/>
-          </a:effectRef>
-          <a:fontRef idx="minor">
-            <a:schemeClr val="lt1"/>
-          </a:fontRef>
-        </p:style>
-        <p:txBody>
-          <a:bodyPr rtlCol="0" anchor="ctr"/>
-          <a:lstStyle/>
-          <a:p>
-            <a:pPr algn="ctr"/>
-          </a:p>
-        </p:txBody>
-      </p:sp>
-      <p:sp>
-        <p:nvSpPr>
-          <p:cNvPr id="41" name="TextBox 40"/>
-          <p:cNvSpPr txBox="1"/>
-          <p:nvPr/>
-        </p:nvSpPr>
-        <p:spPr>
-          <a:xfrm>
-            <a:off x="8821674" y="5961888"/>
-            <a:ext cx="2635758" cy="320040"/>
-          </a:xfrm>
-          <a:prstGeom prst="rect">
-            <a:avLst/>
-          </a:prstGeom>
-          <a:noFill/>
-        </p:spPr>
-        <p:txBody>
-          <a:bodyPr wrap="square" lIns="0" rIns="0" tIns="0" bIns="0">
-            <a:spAutoFit/>
-          </a:bodyPr>
-          <a:lstStyle/>
-          <a:p>
-            <a:pPr algn="ctr"/>
-            <a:r>
-              <a:rPr sz="1800" b="1" i="0">
-                <a:solidFill>
-                  <a:srgbClr val="F87171"/>
-                </a:solidFill>
-              </a:rPr>
-              <a:t>1 hop</a:t>
-            </a:r>
-          </a:p>
-        </p:txBody>
-      </p:sp>
-      <p:sp>
-        <p:nvSpPr>
-          <p:cNvPr id="42" name="TextBox 41"/>
-          <p:cNvSpPr txBox="1"/>
-          <p:nvPr/>
-        </p:nvSpPr>
-        <p:spPr>
-          <a:xfrm>
-            <a:off x="8821674" y="6291072"/>
-            <a:ext cx="2635758" cy="256032"/>
-          </a:xfrm>
-          <a:prstGeom prst="rect">
-            <a:avLst/>
-          </a:prstGeom>
-          <a:noFill/>
-        </p:spPr>
-        <p:txBody>
-          <a:bodyPr wrap="square" lIns="0" rIns="0" tIns="0" bIns="0">
-            <a:spAutoFit/>
-          </a:bodyPr>
-          <a:lstStyle/>
-          <a:p>
-            <a:pPr algn="ctr"/>
-            <a:r>
-              <a:rPr sz="900" b="0" i="0">
-                <a:solidFill>
-                  <a:srgbClr val="B0A0D0"/>
-                </a:solidFill>
-              </a:rPr>
-              <a:t>Jammer detect &amp; blacklist</a:t>
+              <a:t>• 600 ms fast-watchdog recovery automatically triggers if the radio signal is physically blocked.</a:t>
             </a:r>
           </a:p>
         </p:txBody>
@@ -9188,7 +8771,7 @@
                   <a:srgbClr val="A060FF"/>
                 </a:solidFill>
               </a:rPr>
-              <a:t>CRITERIA 5  |  PROJECT PLANNING &amp; MILESTONES  |  2 MARKS</a:t>
+              <a:t>CRITERIA 5  |  EMPIRICAL VALIDATION &amp; DEMO  |  2 MARKS</a:t>
             </a:r>
           </a:p>
         </p:txBody>
@@ -9222,7 +8805,7 @@
                   <a:srgbClr val="FFFFFF"/>
                 </a:solidFill>
               </a:rPr>
-              <a:t>Development Timeline &amp; Phase Completion</a:t>
+              <a:t>Live Demo Runbook &amp; Measured Results</a:t>
             </a:r>
           </a:p>
         </p:txBody>
@@ -9256,7 +8839,7 @@
                   <a:srgbClr val="B0A0D0"/>
                 </a:solidFill>
               </a:rPr>
-              <a:t>Structured engineering phases from literature survey through final empirical validation</a:t>
+              <a:t>4 test scenarios proving zero loss, dynamic blacklisting, and sub-500 ms sync</a:t>
             </a:r>
           </a:p>
         </p:txBody>
@@ -9270,7 +8853,7 @@
         <p:spPr>
           <a:xfrm>
             <a:off x="640080" y="1572768"/>
-            <a:ext cx="10908792" cy="4480560"/>
+            <a:ext cx="5303520" cy="2103120"/>
           </a:xfrm>
           <a:prstGeom prst="rect">
             <a:avLst/>
@@ -9308,159 +8891,48 @@
       </p:sp>
       <p:sp>
         <p:nvSpPr>
-          <p:cNvPr id="8" name="Rectangle 7"/>
+          <p:cNvPr id="8" name="TextBox 7"/>
+          <p:cNvSpPr txBox="1"/>
+          <p:nvPr/>
+        </p:nvSpPr>
+        <p:spPr>
+          <a:xfrm>
+            <a:off x="804672" y="1664208"/>
+            <a:ext cx="4974336" cy="219456"/>
+          </a:xfrm>
+          <a:prstGeom prst="rect">
+            <a:avLst/>
+          </a:prstGeom>
+          <a:noFill/>
+        </p:spPr>
+        <p:txBody>
+          <a:bodyPr wrap="square" lIns="0" rIns="0" tIns="0" bIns="0">
+            <a:spAutoFit/>
+          </a:bodyPr>
+          <a:lstStyle/>
+          <a:p>
+            <a:pPr algn="l"/>
+            <a:r>
+              <a:rPr sz="1050" b="1" i="0">
+                <a:solidFill>
+                  <a:srgbClr val="38BDF8"/>
+                </a:solidFill>
+              </a:rPr>
+              <a:t>Test 1 -- Mesh Power-Up &amp; Sync Lock</a:t>
+            </a:r>
+          </a:p>
+        </p:txBody>
+      </p:sp>
+      <p:sp>
+        <p:nvSpPr>
+          <p:cNvPr id="9" name="Rectangle 8"/>
           <p:cNvSpPr/>
           <p:nvPr/>
         </p:nvSpPr>
         <p:spPr>
           <a:xfrm>
-            <a:off x="9692640" y="1773936"/>
-            <a:ext cx="822960" cy="182880"/>
-          </a:xfrm>
-          <a:prstGeom prst="rect">
-            <a:avLst/>
-          </a:prstGeom>
-          <a:solidFill>
-            <a:srgbClr val="1A5C3A"/>
-          </a:solidFill>
-          <a:ln>
-            <a:noFill/>
-          </a:ln>
-        </p:spPr>
-        <p:style>
-          <a:lnRef idx="1">
-            <a:schemeClr val="accent1"/>
-          </a:lnRef>
-          <a:fillRef idx="3">
-            <a:schemeClr val="accent1"/>
-          </a:fillRef>
-          <a:effectRef idx="2">
-            <a:schemeClr val="accent1"/>
-          </a:effectRef>
-          <a:fontRef idx="minor">
-            <a:schemeClr val="lt1"/>
-          </a:fontRef>
-        </p:style>
-        <p:txBody>
-          <a:bodyPr rtlCol="0" anchor="ctr"/>
-          <a:lstStyle/>
-          <a:p>
-            <a:pPr algn="ctr"/>
-          </a:p>
-        </p:txBody>
-      </p:sp>
-      <p:sp>
-        <p:nvSpPr>
-          <p:cNvPr id="9" name="TextBox 8"/>
-          <p:cNvSpPr txBox="1"/>
-          <p:nvPr/>
-        </p:nvSpPr>
-        <p:spPr>
-          <a:xfrm>
-            <a:off x="9692640" y="1755648"/>
-            <a:ext cx="822960" cy="201168"/>
-          </a:xfrm>
-          <a:prstGeom prst="rect">
-            <a:avLst/>
-          </a:prstGeom>
-          <a:noFill/>
-        </p:spPr>
-        <p:txBody>
-          <a:bodyPr wrap="square" lIns="0" rIns="0" tIns="0" bIns="0">
-            <a:spAutoFit/>
-          </a:bodyPr>
-          <a:lstStyle/>
-          <a:p>
-            <a:pPr algn="ctr"/>
-            <a:r>
-              <a:rPr sz="800" b="1" i="0">
-                <a:solidFill>
-                  <a:srgbClr val="34D399"/>
-                </a:solidFill>
-              </a:rPr>
-              <a:t>Complete</a:t>
-            </a:r>
-          </a:p>
-        </p:txBody>
-      </p:sp>
-      <p:sp>
-        <p:nvSpPr>
-          <p:cNvPr id="10" name="TextBox 9"/>
-          <p:cNvSpPr txBox="1"/>
-          <p:nvPr/>
-        </p:nvSpPr>
-        <p:spPr>
-          <a:xfrm>
-            <a:off x="822960" y="1755648"/>
-            <a:ext cx="8686800" cy="201168"/>
-          </a:xfrm>
-          <a:prstGeom prst="rect">
-            <a:avLst/>
-          </a:prstGeom>
-          <a:noFill/>
-        </p:spPr>
-        <p:txBody>
-          <a:bodyPr wrap="square" lIns="0" rIns="0" tIns="0" bIns="0">
-            <a:spAutoFit/>
-          </a:bodyPr>
-          <a:lstStyle/>
-          <a:p>
-            <a:pPr algn="l"/>
-            <a:r>
-              <a:rPr sz="1000" b="1" i="0">
-                <a:solidFill>
-                  <a:srgbClr val="FFFFFF"/>
-                </a:solidFill>
-              </a:rPr>
-              <a:t>Phase 1 -- Literature Survey &amp; Threat Modelling</a:t>
-            </a:r>
-          </a:p>
-        </p:txBody>
-      </p:sp>
-      <p:sp>
-        <p:nvSpPr>
-          <p:cNvPr id="11" name="TextBox 10"/>
-          <p:cNvSpPr txBox="1"/>
-          <p:nvPr/>
-        </p:nvSpPr>
-        <p:spPr>
-          <a:xfrm>
-            <a:off x="896112" y="2011680"/>
-            <a:ext cx="9601200" cy="384048"/>
-          </a:xfrm>
-          <a:prstGeom prst="rect">
-            <a:avLst/>
-          </a:prstGeom>
-          <a:noFill/>
-        </p:spPr>
-        <p:txBody>
-          <a:bodyPr wrap="square" lIns="0" rIns="0" tIns="0" bIns="0">
-            <a:spAutoFit/>
-          </a:bodyPr>
-          <a:lstStyle/>
-          <a:p>
-            <a:pPr algn="l"/>
-            <a:r>
-              <a:rPr sz="900" b="0" i="0">
-                <a:solidFill>
-                  <a:srgbClr val="B0A0D0"/>
-                </a:solidFill>
-              </a:rPr>
-              <a:t>Surveyed 100+ IEEE/ACM papers across FHSS, blacklisting, DTN, and game theory. Defined 4 jammer attack profiles (spot, sweep, random, reactive) and the DTN edge buffering requirements.</a:t>
-            </a:r>
-          </a:p>
-        </p:txBody>
-      </p:sp>
-      <p:sp>
-        <p:nvSpPr>
-          <p:cNvPr id="12" name="Rectangle 11"/>
-          <p:cNvSpPr/>
-          <p:nvPr/>
-        </p:nvSpPr>
-        <p:spPr>
-          <a:xfrm>
-            <a:off x="822960" y="2523744"/>
-            <a:ext cx="9784080" cy="9525"/>
+            <a:off x="804672" y="1920240"/>
+            <a:ext cx="4974336" cy="9525"/>
           </a:xfrm>
           <a:prstGeom prst="rect">
             <a:avLst/>
@@ -9496,23 +8968,127 @@
       </p:sp>
       <p:sp>
         <p:nvSpPr>
+          <p:cNvPr id="10" name="TextBox 9"/>
+          <p:cNvSpPr txBox="1"/>
+          <p:nvPr/>
+        </p:nvSpPr>
+        <p:spPr>
+          <a:xfrm>
+            <a:off x="841248" y="2011680"/>
+            <a:ext cx="4901184" cy="384048"/>
+          </a:xfrm>
+          <a:prstGeom prst="rect">
+            <a:avLst/>
+          </a:prstGeom>
+          <a:noFill/>
+        </p:spPr>
+        <p:txBody>
+          <a:bodyPr wrap="square" lIns="0" rIns="0" tIns="0" bIns="0">
+            <a:spAutoFit/>
+          </a:bodyPr>
+          <a:lstStyle/>
+          <a:p>
+            <a:pPr algn="l"/>
+            <a:r>
+              <a:rPr sz="900" b="0" i="0">
+                <a:solidFill>
+                  <a:srgbClr val="B0A0D0"/>
+                </a:solidFill>
+              </a:rPr>
+              <a:t>1.  Power up Node B. LCD shows:  CH:---  HOP:0  BUF:0  JAM:0</a:t>
+            </a:r>
+          </a:p>
+        </p:txBody>
+      </p:sp>
+      <p:sp>
+        <p:nvSpPr>
+          <p:cNvPr id="11" name="TextBox 10"/>
+          <p:cNvSpPr txBox="1"/>
+          <p:nvPr/>
+        </p:nvSpPr>
+        <p:spPr>
+          <a:xfrm>
+            <a:off x="841248" y="2450592"/>
+            <a:ext cx="4901184" cy="384048"/>
+          </a:xfrm>
+          <a:prstGeom prst="rect">
+            <a:avLst/>
+          </a:prstGeom>
+          <a:noFill/>
+        </p:spPr>
+        <p:txBody>
+          <a:bodyPr wrap="square" lIns="0" rIns="0" tIns="0" bIns="0">
+            <a:spAutoFit/>
+          </a:bodyPr>
+          <a:lstStyle/>
+          <a:p>
+            <a:pPr algn="l"/>
+            <a:r>
+              <a:rPr sz="900" b="0" i="0">
+                <a:solidFill>
+                  <a:srgbClr val="B0A0D0"/>
+                </a:solidFill>
+              </a:rPr>
+              <a:t>2.  Power Nodes A &amp; C. Both lock onto SYNC beacon within 380 ms.</a:t>
+            </a:r>
+          </a:p>
+        </p:txBody>
+      </p:sp>
+      <p:sp>
+        <p:nvSpPr>
+          <p:cNvPr id="12" name="TextBox 11"/>
+          <p:cNvSpPr txBox="1"/>
+          <p:nvPr/>
+        </p:nvSpPr>
+        <p:spPr>
+          <a:xfrm>
+            <a:off x="841248" y="2889504"/>
+            <a:ext cx="4901184" cy="384048"/>
+          </a:xfrm>
+          <a:prstGeom prst="rect">
+            <a:avLst/>
+          </a:prstGeom>
+          <a:noFill/>
+        </p:spPr>
+        <p:txBody>
+          <a:bodyPr wrap="square" lIns="0" rIns="0" tIns="0" bIns="0">
+            <a:spAutoFit/>
+          </a:bodyPr>
+          <a:lstStyle/>
+          <a:p>
+            <a:pPr algn="l"/>
+            <a:r>
+              <a:rPr sz="900" b="0" i="0">
+                <a:solidFill>
+                  <a:srgbClr val="B0A0D0"/>
+                </a:solidFill>
+              </a:rPr>
+              <a:t>3.  All three nodes begin hopping across 124 channels in lockstep.</a:t>
+            </a:r>
+          </a:p>
+        </p:txBody>
+      </p:sp>
+      <p:sp>
+        <p:nvSpPr>
           <p:cNvPr id="13" name="Rectangle 12"/>
           <p:cNvSpPr/>
           <p:nvPr/>
         </p:nvSpPr>
         <p:spPr>
           <a:xfrm>
-            <a:off x="9692640" y="2615184"/>
-            <a:ext cx="822960" cy="182880"/>
+            <a:off x="6153912" y="1572768"/>
+            <a:ext cx="5303520" cy="2103120"/>
           </a:xfrm>
           <a:prstGeom prst="rect">
             <a:avLst/>
           </a:prstGeom>
           <a:solidFill>
-            <a:srgbClr val="1A5C3A"/>
+            <a:srgbClr val="2A145E"/>
           </a:solidFill>
-          <a:ln>
-            <a:noFill/>
+          <a:ln w="7620">
+            <a:solidFill>
+              <a:srgbClr val="503090"/>
+            </a:solidFill>
           </a:ln>
         </p:spPr>
         <p:style>
@@ -9545,110 +9121,42 @@
         </p:nvSpPr>
         <p:spPr>
           <a:xfrm>
-            <a:off x="9692640" y="2596896"/>
-            <a:ext cx="822960" cy="201168"/>
-          </a:xfrm>
-          <a:prstGeom prst="rect">
-            <a:avLst/>
-          </a:prstGeom>
-          <a:noFill/>
-        </p:spPr>
-        <p:txBody>
-          <a:bodyPr wrap="square" lIns="0" rIns="0" tIns="0" bIns="0">
-            <a:spAutoFit/>
-          </a:bodyPr>
-          <a:lstStyle/>
-          <a:p>
-            <a:pPr algn="ctr"/>
-            <a:r>
-              <a:rPr sz="800" b="1" i="0">
+            <a:off x="6318504" y="1664208"/>
+            <a:ext cx="4974336" cy="219456"/>
+          </a:xfrm>
+          <a:prstGeom prst="rect">
+            <a:avLst/>
+          </a:prstGeom>
+          <a:noFill/>
+        </p:spPr>
+        <p:txBody>
+          <a:bodyPr wrap="square" lIns="0" rIns="0" tIns="0" bIns="0">
+            <a:spAutoFit/>
+          </a:bodyPr>
+          <a:lstStyle/>
+          <a:p>
+            <a:pPr algn="l"/>
+            <a:r>
+              <a:rPr sz="1050" b="1" i="0">
                 <a:solidFill>
                   <a:srgbClr val="34D399"/>
                 </a:solidFill>
               </a:rPr>
-              <a:t>Complete</a:t>
-            </a:r>
-          </a:p>
-        </p:txBody>
-      </p:sp>
-      <p:sp>
-        <p:nvSpPr>
-          <p:cNvPr id="15" name="TextBox 14"/>
-          <p:cNvSpPr txBox="1"/>
-          <p:nvPr/>
-        </p:nvSpPr>
-        <p:spPr>
-          <a:xfrm>
-            <a:off x="822960" y="2596896"/>
-            <a:ext cx="8686800" cy="201168"/>
-          </a:xfrm>
-          <a:prstGeom prst="rect">
-            <a:avLst/>
-          </a:prstGeom>
-          <a:noFill/>
-        </p:spPr>
-        <p:txBody>
-          <a:bodyPr wrap="square" lIns="0" rIns="0" tIns="0" bIns="0">
-            <a:spAutoFit/>
-          </a:bodyPr>
-          <a:lstStyle/>
-          <a:p>
-            <a:pPr algn="l"/>
-            <a:r>
-              <a:rPr sz="1000" b="1" i="0">
-                <a:solidFill>
-                  <a:srgbClr val="FFFFFF"/>
-                </a:solidFill>
-              </a:rPr>
-              <a:t>Phase 2 -- Protocol Design &amp; Mathematical Models</a:t>
-            </a:r>
-          </a:p>
-        </p:txBody>
-      </p:sp>
-      <p:sp>
-        <p:nvSpPr>
-          <p:cNvPr id="16" name="TextBox 15"/>
-          <p:cNvSpPr txBox="1"/>
-          <p:nvPr/>
-        </p:nvSpPr>
-        <p:spPr>
-          <a:xfrm>
-            <a:off x="896112" y="2852928"/>
-            <a:ext cx="9601200" cy="384048"/>
-          </a:xfrm>
-          <a:prstGeom prst="rect">
-            <a:avLst/>
-          </a:prstGeom>
-          <a:noFill/>
-        </p:spPr>
-        <p:txBody>
-          <a:bodyPr wrap="square" lIns="0" rIns="0" tIns="0" bIns="0">
-            <a:spAutoFit/>
-          </a:bodyPr>
-          <a:lstStyle/>
-          <a:p>
-            <a:pPr algn="l"/>
-            <a:r>
-              <a:rPr sz="900" b="0" i="0">
-                <a:solidFill>
-                  <a:srgbClr val="B0A0D0"/>
-                </a:solidFill>
-              </a:rPr>
-              <a:t>Designed 25 ms slotted frame structure with 6 sub-phases. Developed XORShift32 PRNG for deterministic lockstep hopping. Specified 32-byte frame format with CRC-8 integrity and 16-byte blacklist bitmap for zero-negotiation avoidance.</a:t>
-            </a:r>
-          </a:p>
-        </p:txBody>
-      </p:sp>
-      <p:sp>
-        <p:nvSpPr>
-          <p:cNvPr id="17" name="Rectangle 16"/>
+              <a:t>Test 2 -- End-to-End Message Delivery</a:t>
+            </a:r>
+          </a:p>
+        </p:txBody>
+      </p:sp>
+      <p:sp>
+        <p:nvSpPr>
+          <p:cNvPr id="15" name="Rectangle 14"/>
           <p:cNvSpPr/>
           <p:nvPr/>
         </p:nvSpPr>
         <p:spPr>
           <a:xfrm>
-            <a:off x="822960" y="3364992"/>
-            <a:ext cx="9784080" cy="9525"/>
+            <a:off x="6318504" y="1920240"/>
+            <a:ext cx="4974336" cy="9525"/>
           </a:xfrm>
           <a:prstGeom prst="rect">
             <a:avLst/>
@@ -9684,23 +9192,127 @@
       </p:sp>
       <p:sp>
         <p:nvSpPr>
-          <p:cNvPr id="18" name="Rectangle 17"/>
+          <p:cNvPr id="16" name="TextBox 15"/>
+          <p:cNvSpPr txBox="1"/>
+          <p:nvPr/>
+        </p:nvSpPr>
+        <p:spPr>
+          <a:xfrm>
+            <a:off x="6355080" y="2011680"/>
+            <a:ext cx="4901184" cy="384048"/>
+          </a:xfrm>
+          <a:prstGeom prst="rect">
+            <a:avLst/>
+          </a:prstGeom>
+          <a:noFill/>
+        </p:spPr>
+        <p:txBody>
+          <a:bodyPr wrap="square" lIns="0" rIns="0" tIns="0" bIns="0">
+            <a:spAutoFit/>
+          </a:bodyPr>
+          <a:lstStyle/>
+          <a:p>
+            <a:pPr algn="l"/>
+            <a:r>
+              <a:rPr sz="900" b="0" i="0">
+                <a:solidFill>
+                  <a:srgbClr val="B0A0D0"/>
+                </a:solidFill>
+              </a:rPr>
+              <a:t>1.  Send 'Code Blue Room 304' from Node A web UI or Supabase dashboard.</a:t>
+            </a:r>
+          </a:p>
+        </p:txBody>
+      </p:sp>
+      <p:sp>
+        <p:nvSpPr>
+          <p:cNvPr id="17" name="TextBox 16"/>
+          <p:cNvSpPr txBox="1"/>
+          <p:nvPr/>
+        </p:nvSpPr>
+        <p:spPr>
+          <a:xfrm>
+            <a:off x="6355080" y="2450592"/>
+            <a:ext cx="4901184" cy="384048"/>
+          </a:xfrm>
+          <a:prstGeom prst="rect">
+            <a:avLst/>
+          </a:prstGeom>
+          <a:noFill/>
+        </p:spPr>
+        <p:txBody>
+          <a:bodyPr wrap="square" lIns="0" rIns="0" tIns="0" bIns="0">
+            <a:spAutoFit/>
+          </a:bodyPr>
+          <a:lstStyle/>
+          <a:p>
+            <a:pPr algn="l"/>
+            <a:r>
+              <a:rPr sz="900" b="0" i="0">
+                <a:solidFill>
+                  <a:srgbClr val="B0A0D0"/>
+                </a:solidFill>
+              </a:rPr>
+              <a:t>2.  Node A encapsulates in 32B frame, transmits to B. B forwards to C.</a:t>
+            </a:r>
+          </a:p>
+        </p:txBody>
+      </p:sp>
+      <p:sp>
+        <p:nvSpPr>
+          <p:cNvPr id="18" name="TextBox 17"/>
+          <p:cNvSpPr txBox="1"/>
+          <p:nvPr/>
+        </p:nvSpPr>
+        <p:spPr>
+          <a:xfrm>
+            <a:off x="6355080" y="2889504"/>
+            <a:ext cx="4901184" cy="384048"/>
+          </a:xfrm>
+          <a:prstGeom prst="rect">
+            <a:avLst/>
+          </a:prstGeom>
+          <a:noFill/>
+        </p:spPr>
+        <p:txBody>
+          <a:bodyPr wrap="square" lIns="0" rIns="0" tIns="0" bIns="0">
+            <a:spAutoFit/>
+          </a:bodyPr>
+          <a:lstStyle/>
+          <a:p>
+            <a:pPr algn="l"/>
+            <a:r>
+              <a:rPr sz="900" b="0" i="0">
+                <a:solidFill>
+                  <a:srgbClr val="B0A0D0"/>
+                </a:solidFill>
+              </a:rPr>
+              <a:t>3.  Node C receives and confirms delivery. Round-trip &lt; 65 ms.</a:t>
+            </a:r>
+          </a:p>
+        </p:txBody>
+      </p:sp>
+      <p:sp>
+        <p:nvSpPr>
+          <p:cNvPr id="19" name="Rectangle 18"/>
           <p:cNvSpPr/>
           <p:nvPr/>
         </p:nvSpPr>
         <p:spPr>
           <a:xfrm>
-            <a:off x="9692640" y="3456432"/>
-            <a:ext cx="822960" cy="182880"/>
+            <a:off x="640080" y="3831336"/>
+            <a:ext cx="5303520" cy="2103120"/>
           </a:xfrm>
           <a:prstGeom prst="rect">
             <a:avLst/>
           </a:prstGeom>
           <a:solidFill>
-            <a:srgbClr val="1A5C3A"/>
+            <a:srgbClr val="2A145E"/>
           </a:solidFill>
-          <a:ln>
-            <a:noFill/>
+          <a:ln w="7620">
+            <a:solidFill>
+              <a:srgbClr val="503090"/>
+            </a:solidFill>
           </a:ln>
         </p:spPr>
         <p:style>
@@ -9727,116 +9339,48 @@
       </p:sp>
       <p:sp>
         <p:nvSpPr>
-          <p:cNvPr id="19" name="TextBox 18"/>
-          <p:cNvSpPr txBox="1"/>
-          <p:nvPr/>
-        </p:nvSpPr>
-        <p:spPr>
-          <a:xfrm>
-            <a:off x="9692640" y="3438144"/>
-            <a:ext cx="822960" cy="201168"/>
-          </a:xfrm>
-          <a:prstGeom prst="rect">
-            <a:avLst/>
-          </a:prstGeom>
-          <a:noFill/>
-        </p:spPr>
-        <p:txBody>
-          <a:bodyPr wrap="square" lIns="0" rIns="0" tIns="0" bIns="0">
-            <a:spAutoFit/>
-          </a:bodyPr>
-          <a:lstStyle/>
-          <a:p>
-            <a:pPr algn="ctr"/>
-            <a:r>
-              <a:rPr sz="800" b="1" i="0">
-                <a:solidFill>
-                  <a:srgbClr val="34D399"/>
-                </a:solidFill>
-              </a:rPr>
-              <a:t>Complete</a:t>
-            </a:r>
-          </a:p>
-        </p:txBody>
-      </p:sp>
-      <p:sp>
-        <p:nvSpPr>
           <p:cNvPr id="20" name="TextBox 19"/>
           <p:cNvSpPr txBox="1"/>
           <p:nvPr/>
         </p:nvSpPr>
         <p:spPr>
           <a:xfrm>
-            <a:off x="822960" y="3438144"/>
-            <a:ext cx="8686800" cy="201168"/>
-          </a:xfrm>
-          <a:prstGeom prst="rect">
-            <a:avLst/>
-          </a:prstGeom>
-          <a:noFill/>
-        </p:spPr>
-        <p:txBody>
-          <a:bodyPr wrap="square" lIns="0" rIns="0" tIns="0" bIns="0">
-            <a:spAutoFit/>
-          </a:bodyPr>
-          <a:lstStyle/>
-          <a:p>
-            <a:pPr algn="l"/>
-            <a:r>
-              <a:rPr sz="1000" b="1" i="0">
-                <a:solidFill>
-                  <a:srgbClr val="FFFFFF"/>
-                </a:solidFill>
-              </a:rPr>
-              <a:t>Phase 3 -- Firmware Development &amp; Hardware Assembly</a:t>
-            </a:r>
-          </a:p>
-        </p:txBody>
-      </p:sp>
-      <p:sp>
-        <p:nvSpPr>
-          <p:cNvPr id="21" name="TextBox 20"/>
-          <p:cNvSpPr txBox="1"/>
-          <p:nvPr/>
-        </p:nvSpPr>
-        <p:spPr>
-          <a:xfrm>
-            <a:off x="896112" y="3694176"/>
-            <a:ext cx="9601200" cy="384048"/>
-          </a:xfrm>
-          <a:prstGeom prst="rect">
-            <a:avLst/>
-          </a:prstGeom>
-          <a:noFill/>
-        </p:spPr>
-        <p:txBody>
-          <a:bodyPr wrap="square" lIns="0" rIns="0" tIns="0" bIns="0">
-            <a:spAutoFit/>
-          </a:bodyPr>
-          <a:lstStyle/>
-          <a:p>
-            <a:pPr algn="l"/>
-            <a:r>
-              <a:rPr sz="900" b="0" i="0">
-                <a:solidFill>
-                  <a:srgbClr val="B0A0D0"/>
-                </a:solidFill>
-              </a:rPr>
-              <a:t>Wrote all node firmware in C/C++. Assembled 3 ESP32 nodes with nRF24L01+ transceivers and SPI bus. Built Arduino Mega jammer console with 3.5" TFT touchscreen. Verified clean compilation across all targets.</a:t>
-            </a:r>
-          </a:p>
-        </p:txBody>
-      </p:sp>
-      <p:sp>
-        <p:nvSpPr>
-          <p:cNvPr id="22" name="Rectangle 21"/>
+            <a:off x="804672" y="3922776"/>
+            <a:ext cx="4974336" cy="219456"/>
+          </a:xfrm>
+          <a:prstGeom prst="rect">
+            <a:avLst/>
+          </a:prstGeom>
+          <a:noFill/>
+        </p:spPr>
+        <p:txBody>
+          <a:bodyPr wrap="square" lIns="0" rIns="0" tIns="0" bIns="0">
+            <a:spAutoFit/>
+          </a:bodyPr>
+          <a:lstStyle/>
+          <a:p>
+            <a:pPr algn="l"/>
+            <a:r>
+              <a:rPr sz="1050" b="1" i="0">
+                <a:solidFill>
+                  <a:srgbClr val="FBBF24"/>
+                </a:solidFill>
+              </a:rPr>
+              <a:t>Test 3 -- Dead-Zone Buffering (Zero-Loss Proof)</a:t>
+            </a:r>
+          </a:p>
+        </p:txBody>
+      </p:sp>
+      <p:sp>
+        <p:nvSpPr>
+          <p:cNvPr id="21" name="Rectangle 20"/>
           <p:cNvSpPr/>
           <p:nvPr/>
         </p:nvSpPr>
         <p:spPr>
           <a:xfrm>
-            <a:off x="822960" y="4206240"/>
-            <a:ext cx="9784080" cy="9525"/>
+            <a:off x="804672" y="4178808"/>
+            <a:ext cx="4974336" cy="9525"/>
           </a:xfrm>
           <a:prstGeom prst="rect">
             <a:avLst/>
@@ -9872,23 +9416,127 @@
       </p:sp>
       <p:sp>
         <p:nvSpPr>
-          <p:cNvPr id="23" name="Rectangle 22"/>
+          <p:cNvPr id="22" name="TextBox 21"/>
+          <p:cNvSpPr txBox="1"/>
+          <p:nvPr/>
+        </p:nvSpPr>
+        <p:spPr>
+          <a:xfrm>
+            <a:off x="841248" y="4270248"/>
+            <a:ext cx="4901184" cy="384048"/>
+          </a:xfrm>
+          <a:prstGeom prst="rect">
+            <a:avLst/>
+          </a:prstGeom>
+          <a:noFill/>
+        </p:spPr>
+        <p:txBody>
+          <a:bodyPr wrap="square" lIns="0" rIns="0" tIns="0" bIns="0">
+            <a:spAutoFit/>
+          </a:bodyPr>
+          <a:lstStyle/>
+          <a:p>
+            <a:pPr algn="l"/>
+            <a:r>
+              <a:rPr sz="900" b="0" i="0">
+                <a:solidFill>
+                  <a:srgbClr val="B0A0D0"/>
+                </a:solidFill>
+              </a:rPr>
+              <a:t>1.  Unplug Node C to simulate doctor entering an elevator.</a:t>
+            </a:r>
+          </a:p>
+        </p:txBody>
+      </p:sp>
+      <p:sp>
+        <p:nvSpPr>
+          <p:cNvPr id="23" name="TextBox 22"/>
+          <p:cNvSpPr txBox="1"/>
+          <p:nvPr/>
+        </p:nvSpPr>
+        <p:spPr>
+          <a:xfrm>
+            <a:off x="841248" y="4709160"/>
+            <a:ext cx="4901184" cy="384048"/>
+          </a:xfrm>
+          <a:prstGeom prst="rect">
+            <a:avLst/>
+          </a:prstGeom>
+          <a:noFill/>
+        </p:spPr>
+        <p:txBody>
+          <a:bodyPr wrap="square" lIns="0" rIns="0" tIns="0" bIns="0">
+            <a:spAutoFit/>
+          </a:bodyPr>
+          <a:lstStyle/>
+          <a:p>
+            <a:pPr algn="l"/>
+            <a:r>
+              <a:rPr sz="900" b="0" i="0">
+                <a:solidFill>
+                  <a:srgbClr val="B0A0D0"/>
+                </a:solidFill>
+              </a:rPr>
+              <a:t>2.  Dispatch 5 messages. Node B LCD updates:  BUF: 5 pk.</a:t>
+            </a:r>
+          </a:p>
+        </p:txBody>
+      </p:sp>
+      <p:sp>
+        <p:nvSpPr>
+          <p:cNvPr id="24" name="TextBox 23"/>
+          <p:cNvSpPr txBox="1"/>
+          <p:nvPr/>
+        </p:nvSpPr>
+        <p:spPr>
+          <a:xfrm>
+            <a:off x="841248" y="5148072"/>
+            <a:ext cx="4901184" cy="384048"/>
+          </a:xfrm>
+          <a:prstGeom prst="rect">
+            <a:avLst/>
+          </a:prstGeom>
+          <a:noFill/>
+        </p:spPr>
+        <p:txBody>
+          <a:bodyPr wrap="square" lIns="0" rIns="0" tIns="0" bIns="0">
+            <a:spAutoFit/>
+          </a:bodyPr>
+          <a:lstStyle/>
+          <a:p>
+            <a:pPr algn="l"/>
+            <a:r>
+              <a:rPr sz="900" b="0" i="0">
+                <a:solidFill>
+                  <a:srgbClr val="B0A0D0"/>
+                </a:solidFill>
+              </a:rPr>
+              <a:t>3.  Plug C back in. All 5 packets drain within 240 ms. 0.0% loss.</a:t>
+            </a:r>
+          </a:p>
+        </p:txBody>
+      </p:sp>
+      <p:sp>
+        <p:nvSpPr>
+          <p:cNvPr id="25" name="Rectangle 24"/>
           <p:cNvSpPr/>
           <p:nvPr/>
         </p:nvSpPr>
         <p:spPr>
           <a:xfrm>
-            <a:off x="9692640" y="4297680"/>
-            <a:ext cx="822960" cy="182880"/>
+            <a:off x="6153912" y="3831336"/>
+            <a:ext cx="5303520" cy="2103120"/>
           </a:xfrm>
           <a:prstGeom prst="rect">
             <a:avLst/>
           </a:prstGeom>
           <a:solidFill>
-            <a:srgbClr val="1A5C3A"/>
+            <a:srgbClr val="2A145E"/>
           </a:solidFill>
-          <a:ln>
-            <a:noFill/>
+          <a:ln w="7620">
+            <a:solidFill>
+              <a:srgbClr val="503090"/>
+            </a:solidFill>
           </a:ln>
         </p:spPr>
         <p:style>
@@ -9915,102 +9563,34 @@
       </p:sp>
       <p:sp>
         <p:nvSpPr>
-          <p:cNvPr id="24" name="TextBox 23"/>
-          <p:cNvSpPr txBox="1"/>
-          <p:nvPr/>
-        </p:nvSpPr>
-        <p:spPr>
-          <a:xfrm>
-            <a:off x="9692640" y="4279392"/>
-            <a:ext cx="822960" cy="201168"/>
-          </a:xfrm>
-          <a:prstGeom prst="rect">
-            <a:avLst/>
-          </a:prstGeom>
-          <a:noFill/>
-        </p:spPr>
-        <p:txBody>
-          <a:bodyPr wrap="square" lIns="0" rIns="0" tIns="0" bIns="0">
-            <a:spAutoFit/>
-          </a:bodyPr>
-          <a:lstStyle/>
-          <a:p>
-            <a:pPr algn="ctr"/>
-            <a:r>
-              <a:rPr sz="800" b="1" i="0">
-                <a:solidFill>
-                  <a:srgbClr val="34D399"/>
-                </a:solidFill>
-              </a:rPr>
-              <a:t>Complete</a:t>
-            </a:r>
-          </a:p>
-        </p:txBody>
-      </p:sp>
-      <p:sp>
-        <p:nvSpPr>
-          <p:cNvPr id="25" name="TextBox 24"/>
-          <p:cNvSpPr txBox="1"/>
-          <p:nvPr/>
-        </p:nvSpPr>
-        <p:spPr>
-          <a:xfrm>
-            <a:off x="822960" y="4279392"/>
-            <a:ext cx="8686800" cy="201168"/>
-          </a:xfrm>
-          <a:prstGeom prst="rect">
-            <a:avLst/>
-          </a:prstGeom>
-          <a:noFill/>
-        </p:spPr>
-        <p:txBody>
-          <a:bodyPr wrap="square" lIns="0" rIns="0" tIns="0" bIns="0">
-            <a:spAutoFit/>
-          </a:bodyPr>
-          <a:lstStyle/>
-          <a:p>
-            <a:pPr algn="l"/>
-            <a:r>
-              <a:rPr sz="1000" b="1" i="0">
-                <a:solidFill>
-                  <a:srgbClr val="FFFFFF"/>
-                </a:solidFill>
-              </a:rPr>
-              <a:t>Phase 4 -- Cloud Backend &amp; Web Dashboard</a:t>
-            </a:r>
-          </a:p>
-        </p:txBody>
-      </p:sp>
-      <p:sp>
-        <p:nvSpPr>
           <p:cNvPr id="26" name="TextBox 25"/>
           <p:cNvSpPr txBox="1"/>
           <p:nvPr/>
         </p:nvSpPr>
         <p:spPr>
           <a:xfrm>
-            <a:off x="896112" y="4535424"/>
-            <a:ext cx="9601200" cy="384048"/>
-          </a:xfrm>
-          <a:prstGeom prst="rect">
-            <a:avLst/>
-          </a:prstGeom>
-          <a:noFill/>
-        </p:spPr>
-        <p:txBody>
-          <a:bodyPr wrap="square" lIns="0" rIns="0" tIns="0" bIns="0">
-            <a:spAutoFit/>
-          </a:bodyPr>
-          <a:lstStyle/>
-          <a:p>
-            <a:pPr algn="l"/>
-            <a:r>
-              <a:rPr sz="900" b="0" i="0">
-                <a:solidFill>
-                  <a:srgbClr val="B0A0D0"/>
-                </a:solidFill>
-              </a:rPr>
-              <a:t>Configured Supabase PostgreSQL with 4 relational tables. Implemented REST API polling on ESP32 nodes. Built HTML5/CSS3 124-channel spectrum heatmap with WebSocket real-time telemetry streaming.</a:t>
+            <a:off x="6318504" y="3922776"/>
+            <a:ext cx="4974336" cy="219456"/>
+          </a:xfrm>
+          <a:prstGeom prst="rect">
+            <a:avLst/>
+          </a:prstGeom>
+          <a:noFill/>
+        </p:spPr>
+        <p:txBody>
+          <a:bodyPr wrap="square" lIns="0" rIns="0" tIns="0" bIns="0">
+            <a:spAutoFit/>
+          </a:bodyPr>
+          <a:lstStyle/>
+          <a:p>
+            <a:pPr algn="l"/>
+            <a:r>
+              <a:rPr sz="1050" b="1" i="0">
+                <a:solidFill>
+                  <a:srgbClr val="F87171"/>
+                </a:solidFill>
+              </a:rPr>
+              <a:t>Test 4 -- RF Jammer Stress &amp; Blacklisting</a:t>
             </a:r>
           </a:p>
         </p:txBody>
@@ -10023,8 +9603,8 @@
         </p:nvSpPr>
         <p:spPr>
           <a:xfrm>
-            <a:off x="822960" y="5047488"/>
-            <a:ext cx="9784080" cy="9525"/>
+            <a:off x="6318504" y="4178808"/>
+            <a:ext cx="4974336" cy="9525"/>
           </a:xfrm>
           <a:prstGeom prst="rect">
             <a:avLst/>
@@ -10060,23 +9640,127 @@
       </p:sp>
       <p:sp>
         <p:nvSpPr>
-          <p:cNvPr id="28" name="Rectangle 27"/>
+          <p:cNvPr id="28" name="TextBox 27"/>
+          <p:cNvSpPr txBox="1"/>
+          <p:nvPr/>
+        </p:nvSpPr>
+        <p:spPr>
+          <a:xfrm>
+            <a:off x="6355080" y="4270248"/>
+            <a:ext cx="4901184" cy="384048"/>
+          </a:xfrm>
+          <a:prstGeom prst="rect">
+            <a:avLst/>
+          </a:prstGeom>
+          <a:noFill/>
+        </p:spPr>
+        <p:txBody>
+          <a:bodyPr wrap="square" lIns="0" rIns="0" tIns="0" bIns="0">
+            <a:spAutoFit/>
+          </a:bodyPr>
+          <a:lstStyle/>
+          <a:p>
+            <a:pPr algn="l"/>
+            <a:r>
+              <a:rPr sz="900" b="0" i="0">
+                <a:solidFill>
+                  <a:srgbClr val="B0A0D0"/>
+                </a:solidFill>
+              </a:rPr>
+              <a:t>1.  Mega jammer fires +20 dBm spot jammer on CH 45 (2.445 GHz).</a:t>
+            </a:r>
+          </a:p>
+        </p:txBody>
+      </p:sp>
+      <p:sp>
+        <p:nvSpPr>
+          <p:cNvPr id="29" name="TextBox 28"/>
+          <p:cNvSpPr txBox="1"/>
+          <p:nvPr/>
+        </p:nvSpPr>
+        <p:spPr>
+          <a:xfrm>
+            <a:off x="6355080" y="4709160"/>
+            <a:ext cx="4901184" cy="384048"/>
+          </a:xfrm>
+          <a:prstGeom prst="rect">
+            <a:avLst/>
+          </a:prstGeom>
+          <a:noFill/>
+        </p:spPr>
+        <p:txBody>
+          <a:bodyPr wrap="square" lIns="0" rIns="0" tIns="0" bIns="0">
+            <a:spAutoFit/>
+          </a:bodyPr>
+          <a:lstStyle/>
+          <a:p>
+            <a:pPr algn="l"/>
+            <a:r>
+              <a:rPr sz="900" b="0" i="0">
+                <a:solidFill>
+                  <a:srgbClr val="B0A0D0"/>
+                </a:solidFill>
+              </a:rPr>
+              <a:t>2.  Node B detects carrier in quiet tail scan. Blacklists CH 45. LCD: JAM: 1.</a:t>
+            </a:r>
+          </a:p>
+        </p:txBody>
+      </p:sp>
+      <p:sp>
+        <p:nvSpPr>
+          <p:cNvPr id="30" name="TextBox 29"/>
+          <p:cNvSpPr txBox="1"/>
+          <p:nvPr/>
+        </p:nvSpPr>
+        <p:spPr>
+          <a:xfrm>
+            <a:off x="6355080" y="5148072"/>
+            <a:ext cx="4901184" cy="384048"/>
+          </a:xfrm>
+          <a:prstGeom prst="rect">
+            <a:avLst/>
+          </a:prstGeom>
+          <a:noFill/>
+        </p:spPr>
+        <p:txBody>
+          <a:bodyPr wrap="square" lIns="0" rIns="0" tIns="0" bIns="0">
+            <a:spAutoFit/>
+          </a:bodyPr>
+          <a:lstStyle/>
+          <a:p>
+            <a:pPr algn="l"/>
+            <a:r>
+              <a:rPr sz="900" b="0" i="0">
+                <a:solidFill>
+                  <a:srgbClr val="B0A0D0"/>
+                </a:solidFill>
+              </a:rPr>
+              <a:t>3.  All 3 nodes skip CH 45 on the very next hop. Zero packet drop.</a:t>
+            </a:r>
+          </a:p>
+        </p:txBody>
+      </p:sp>
+      <p:sp>
+        <p:nvSpPr>
+          <p:cNvPr id="31" name="Rectangle 30"/>
           <p:cNvSpPr/>
           <p:nvPr/>
         </p:nvSpPr>
         <p:spPr>
           <a:xfrm>
-            <a:off x="9692640" y="5138928"/>
-            <a:ext cx="822960" cy="182880"/>
+            <a:off x="640080" y="5943600"/>
+            <a:ext cx="2635758" cy="658368"/>
           </a:xfrm>
           <a:prstGeom prst="rect">
             <a:avLst/>
           </a:prstGeom>
           <a:solidFill>
-            <a:srgbClr val="1A5C3A"/>
+            <a:srgbClr val="2A145E"/>
           </a:solidFill>
-          <a:ln>
-            <a:noFill/>
+          <a:ln w="7620">
+            <a:solidFill>
+              <a:srgbClr val="503090"/>
+            </a:solidFill>
           </a:ln>
         </p:spPr>
         <p:style>
@@ -10103,14 +9787,14 @@
       </p:sp>
       <p:sp>
         <p:nvSpPr>
-          <p:cNvPr id="29" name="TextBox 28"/>
-          <p:cNvSpPr txBox="1"/>
-          <p:nvPr/>
-        </p:nvSpPr>
-        <p:spPr>
-          <a:xfrm>
-            <a:off x="9692640" y="5120640"/>
-            <a:ext cx="822960" cy="201168"/>
+          <p:cNvPr id="32" name="TextBox 31"/>
+          <p:cNvSpPr txBox="1"/>
+          <p:nvPr/>
+        </p:nvSpPr>
+        <p:spPr>
+          <a:xfrm>
+            <a:off x="640080" y="5961888"/>
+            <a:ext cx="2635758" cy="320040"/>
           </a:xfrm>
           <a:prstGeom prst="rect">
             <a:avLst/>
@@ -10125,80 +9809,385 @@
           <a:p>
             <a:pPr algn="ctr"/>
             <a:r>
-              <a:rPr sz="800" b="1" i="0">
+              <a:rPr sz="1800" b="1" i="0">
+                <a:solidFill>
+                  <a:srgbClr val="38BDF8"/>
+                </a:solidFill>
+              </a:rPr>
+              <a:t>380 ms</a:t>
+            </a:r>
+          </a:p>
+        </p:txBody>
+      </p:sp>
+      <p:sp>
+        <p:nvSpPr>
+          <p:cNvPr id="33" name="TextBox 32"/>
+          <p:cNvSpPr txBox="1"/>
+          <p:nvPr/>
+        </p:nvSpPr>
+        <p:spPr>
+          <a:xfrm>
+            <a:off x="640080" y="6291072"/>
+            <a:ext cx="2635758" cy="256032"/>
+          </a:xfrm>
+          <a:prstGeom prst="rect">
+            <a:avLst/>
+          </a:prstGeom>
+          <a:noFill/>
+        </p:spPr>
+        <p:txBody>
+          <a:bodyPr wrap="square" lIns="0" rIns="0" tIns="0" bIns="0">
+            <a:spAutoFit/>
+          </a:bodyPr>
+          <a:lstStyle/>
+          <a:p>
+            <a:pPr algn="ctr"/>
+            <a:r>
+              <a:rPr sz="900" b="0" i="0">
+                <a:solidFill>
+                  <a:srgbClr val="B0A0D0"/>
+                </a:solidFill>
+              </a:rPr>
+              <a:t>Sync acquisition</a:t>
+            </a:r>
+          </a:p>
+        </p:txBody>
+      </p:sp>
+      <p:sp>
+        <p:nvSpPr>
+          <p:cNvPr id="34" name="Rectangle 33"/>
+          <p:cNvSpPr/>
+          <p:nvPr/>
+        </p:nvSpPr>
+        <p:spPr>
+          <a:xfrm>
+            <a:off x="3367278" y="5943600"/>
+            <a:ext cx="2635758" cy="658368"/>
+          </a:xfrm>
+          <a:prstGeom prst="rect">
+            <a:avLst/>
+          </a:prstGeom>
+          <a:solidFill>
+            <a:srgbClr val="2A145E"/>
+          </a:solidFill>
+          <a:ln w="7620">
+            <a:solidFill>
+              <a:srgbClr val="503090"/>
+            </a:solidFill>
+          </a:ln>
+        </p:spPr>
+        <p:style>
+          <a:lnRef idx="1">
+            <a:schemeClr val="accent1"/>
+          </a:lnRef>
+          <a:fillRef idx="3">
+            <a:schemeClr val="accent1"/>
+          </a:fillRef>
+          <a:effectRef idx="2">
+            <a:schemeClr val="accent1"/>
+          </a:effectRef>
+          <a:fontRef idx="minor">
+            <a:schemeClr val="lt1"/>
+          </a:fontRef>
+        </p:style>
+        <p:txBody>
+          <a:bodyPr rtlCol="0" anchor="ctr"/>
+          <a:lstStyle/>
+          <a:p>
+            <a:pPr algn="ctr"/>
+          </a:p>
+        </p:txBody>
+      </p:sp>
+      <p:sp>
+        <p:nvSpPr>
+          <p:cNvPr id="35" name="TextBox 34"/>
+          <p:cNvSpPr txBox="1"/>
+          <p:nvPr/>
+        </p:nvSpPr>
+        <p:spPr>
+          <a:xfrm>
+            <a:off x="3367278" y="5961888"/>
+            <a:ext cx="2635758" cy="320040"/>
+          </a:xfrm>
+          <a:prstGeom prst="rect">
+            <a:avLst/>
+          </a:prstGeom>
+          <a:noFill/>
+        </p:spPr>
+        <p:txBody>
+          <a:bodyPr wrap="square" lIns="0" rIns="0" tIns="0" bIns="0">
+            <a:spAutoFit/>
+          </a:bodyPr>
+          <a:lstStyle/>
+          <a:p>
+            <a:pPr algn="ctr"/>
+            <a:r>
+              <a:rPr sz="1800" b="1" i="0">
                 <a:solidFill>
                   <a:srgbClr val="34D399"/>
                 </a:solidFill>
               </a:rPr>
-              <a:t>Complete</a:t>
-            </a:r>
-          </a:p>
-        </p:txBody>
-      </p:sp>
-      <p:sp>
-        <p:nvSpPr>
-          <p:cNvPr id="30" name="TextBox 29"/>
-          <p:cNvSpPr txBox="1"/>
-          <p:nvPr/>
-        </p:nvSpPr>
-        <p:spPr>
-          <a:xfrm>
-            <a:off x="822960" y="5120640"/>
-            <a:ext cx="8686800" cy="201168"/>
-          </a:xfrm>
-          <a:prstGeom prst="rect">
-            <a:avLst/>
-          </a:prstGeom>
-          <a:noFill/>
-        </p:spPr>
-        <p:txBody>
-          <a:bodyPr wrap="square" lIns="0" rIns="0" tIns="0" bIns="0">
-            <a:spAutoFit/>
-          </a:bodyPr>
-          <a:lstStyle/>
-          <a:p>
-            <a:pPr algn="l"/>
-            <a:r>
-              <a:rPr sz="1000" b="1" i="0">
-                <a:solidFill>
-                  <a:srgbClr val="FFFFFF"/>
-                </a:solidFill>
-              </a:rPr>
-              <a:t>Phase 5 -- RF Simulation &amp; Empirical Validation</a:t>
-            </a:r>
-          </a:p>
-        </p:txBody>
-      </p:sp>
-      <p:sp>
-        <p:nvSpPr>
-          <p:cNvPr id="31" name="TextBox 30"/>
-          <p:cNvSpPr txBox="1"/>
-          <p:nvPr/>
-        </p:nvSpPr>
-        <p:spPr>
-          <a:xfrm>
-            <a:off x="896112" y="5376672"/>
-            <a:ext cx="9601200" cy="384048"/>
-          </a:xfrm>
-          <a:prstGeom prst="rect">
-            <a:avLst/>
-          </a:prstGeom>
-          <a:noFill/>
-        </p:spPr>
-        <p:txBody>
-          <a:bodyPr wrap="square" lIns="0" rIns="0" tIns="0" bIns="0">
-            <a:spAutoFit/>
-          </a:bodyPr>
-          <a:lstStyle/>
-          <a:p>
-            <a:pPr algn="l"/>
+              <a:t>&lt; 65 ms</a:t>
+            </a:r>
+          </a:p>
+        </p:txBody>
+      </p:sp>
+      <p:sp>
+        <p:nvSpPr>
+          <p:cNvPr id="36" name="TextBox 35"/>
+          <p:cNvSpPr txBox="1"/>
+          <p:nvPr/>
+        </p:nvSpPr>
+        <p:spPr>
+          <a:xfrm>
+            <a:off x="3367278" y="6291072"/>
+            <a:ext cx="2635758" cy="256032"/>
+          </a:xfrm>
+          <a:prstGeom prst="rect">
+            <a:avLst/>
+          </a:prstGeom>
+          <a:noFill/>
+        </p:spPr>
+        <p:txBody>
+          <a:bodyPr wrap="square" lIns="0" rIns="0" tIns="0" bIns="0">
+            <a:spAutoFit/>
+          </a:bodyPr>
+          <a:lstStyle/>
+          <a:p>
+            <a:pPr algn="ctr"/>
             <a:r>
               <a:rPr sz="900" b="0" i="0">
                 <a:solidFill>
                   <a:srgbClr val="B0A0D0"/>
                 </a:solidFill>
               </a:rPr>
-              <a:t>Ran Ansys HFSS antenna simulation at 2.45 GHz. Executed all 4 live test scenarios. Measured: sync acquisition 380 ms, dead-zone loss 0.00%, jammer blacklist in 1 hop.</a:t>
+              <a:t>Cloud delivery latency</a:t>
+            </a:r>
+          </a:p>
+        </p:txBody>
+      </p:sp>
+      <p:sp>
+        <p:nvSpPr>
+          <p:cNvPr id="37" name="Rectangle 36"/>
+          <p:cNvSpPr/>
+          <p:nvPr/>
+        </p:nvSpPr>
+        <p:spPr>
+          <a:xfrm>
+            <a:off x="6094476" y="5943600"/>
+            <a:ext cx="2635758" cy="658368"/>
+          </a:xfrm>
+          <a:prstGeom prst="rect">
+            <a:avLst/>
+          </a:prstGeom>
+          <a:solidFill>
+            <a:srgbClr val="2A145E"/>
+          </a:solidFill>
+          <a:ln w="7620">
+            <a:solidFill>
+              <a:srgbClr val="503090"/>
+            </a:solidFill>
+          </a:ln>
+        </p:spPr>
+        <p:style>
+          <a:lnRef idx="1">
+            <a:schemeClr val="accent1"/>
+          </a:lnRef>
+          <a:fillRef idx="3">
+            <a:schemeClr val="accent1"/>
+          </a:fillRef>
+          <a:effectRef idx="2">
+            <a:schemeClr val="accent1"/>
+          </a:effectRef>
+          <a:fontRef idx="minor">
+            <a:schemeClr val="lt1"/>
+          </a:fontRef>
+        </p:style>
+        <p:txBody>
+          <a:bodyPr rtlCol="0" anchor="ctr"/>
+          <a:lstStyle/>
+          <a:p>
+            <a:pPr algn="ctr"/>
+          </a:p>
+        </p:txBody>
+      </p:sp>
+      <p:sp>
+        <p:nvSpPr>
+          <p:cNvPr id="38" name="TextBox 37"/>
+          <p:cNvSpPr txBox="1"/>
+          <p:nvPr/>
+        </p:nvSpPr>
+        <p:spPr>
+          <a:xfrm>
+            <a:off x="6094476" y="5961888"/>
+            <a:ext cx="2635758" cy="320040"/>
+          </a:xfrm>
+          <a:prstGeom prst="rect">
+            <a:avLst/>
+          </a:prstGeom>
+          <a:noFill/>
+        </p:spPr>
+        <p:txBody>
+          <a:bodyPr wrap="square" lIns="0" rIns="0" tIns="0" bIns="0">
+            <a:spAutoFit/>
+          </a:bodyPr>
+          <a:lstStyle/>
+          <a:p>
+            <a:pPr algn="ctr"/>
+            <a:r>
+              <a:rPr sz="1800" b="1" i="0">
+                <a:solidFill>
+                  <a:srgbClr val="FBBF24"/>
+                </a:solidFill>
+              </a:rPr>
+              <a:t>0.00 %</a:t>
+            </a:r>
+          </a:p>
+        </p:txBody>
+      </p:sp>
+      <p:sp>
+        <p:nvSpPr>
+          <p:cNvPr id="39" name="TextBox 38"/>
+          <p:cNvSpPr txBox="1"/>
+          <p:nvPr/>
+        </p:nvSpPr>
+        <p:spPr>
+          <a:xfrm>
+            <a:off x="6094476" y="6291072"/>
+            <a:ext cx="2635758" cy="256032"/>
+          </a:xfrm>
+          <a:prstGeom prst="rect">
+            <a:avLst/>
+          </a:prstGeom>
+          <a:noFill/>
+        </p:spPr>
+        <p:txBody>
+          <a:bodyPr wrap="square" lIns="0" rIns="0" tIns="0" bIns="0">
+            <a:spAutoFit/>
+          </a:bodyPr>
+          <a:lstStyle/>
+          <a:p>
+            <a:pPr algn="ctr"/>
+            <a:r>
+              <a:rPr sz="900" b="0" i="0">
+                <a:solidFill>
+                  <a:srgbClr val="B0A0D0"/>
+                </a:solidFill>
+              </a:rPr>
+              <a:t>Dead-zone packet loss</a:t>
+            </a:r>
+          </a:p>
+        </p:txBody>
+      </p:sp>
+      <p:sp>
+        <p:nvSpPr>
+          <p:cNvPr id="40" name="Rectangle 39"/>
+          <p:cNvSpPr/>
+          <p:nvPr/>
+        </p:nvSpPr>
+        <p:spPr>
+          <a:xfrm>
+            <a:off x="8821674" y="5943600"/>
+            <a:ext cx="2635758" cy="658368"/>
+          </a:xfrm>
+          <a:prstGeom prst="rect">
+            <a:avLst/>
+          </a:prstGeom>
+          <a:solidFill>
+            <a:srgbClr val="2A145E"/>
+          </a:solidFill>
+          <a:ln w="7620">
+            <a:solidFill>
+              <a:srgbClr val="503090"/>
+            </a:solidFill>
+          </a:ln>
+        </p:spPr>
+        <p:style>
+          <a:lnRef idx="1">
+            <a:schemeClr val="accent1"/>
+          </a:lnRef>
+          <a:fillRef idx="3">
+            <a:schemeClr val="accent1"/>
+          </a:fillRef>
+          <a:effectRef idx="2">
+            <a:schemeClr val="accent1"/>
+          </a:effectRef>
+          <a:fontRef idx="minor">
+            <a:schemeClr val="lt1"/>
+          </a:fontRef>
+        </p:style>
+        <p:txBody>
+          <a:bodyPr rtlCol="0" anchor="ctr"/>
+          <a:lstStyle/>
+          <a:p>
+            <a:pPr algn="ctr"/>
+          </a:p>
+        </p:txBody>
+      </p:sp>
+      <p:sp>
+        <p:nvSpPr>
+          <p:cNvPr id="41" name="TextBox 40"/>
+          <p:cNvSpPr txBox="1"/>
+          <p:nvPr/>
+        </p:nvSpPr>
+        <p:spPr>
+          <a:xfrm>
+            <a:off x="8821674" y="5961888"/>
+            <a:ext cx="2635758" cy="320040"/>
+          </a:xfrm>
+          <a:prstGeom prst="rect">
+            <a:avLst/>
+          </a:prstGeom>
+          <a:noFill/>
+        </p:spPr>
+        <p:txBody>
+          <a:bodyPr wrap="square" lIns="0" rIns="0" tIns="0" bIns="0">
+            <a:spAutoFit/>
+          </a:bodyPr>
+          <a:lstStyle/>
+          <a:p>
+            <a:pPr algn="ctr"/>
+            <a:r>
+              <a:rPr sz="1800" b="1" i="0">
+                <a:solidFill>
+                  <a:srgbClr val="F87171"/>
+                </a:solidFill>
+              </a:rPr>
+              <a:t>1 hop</a:t>
+            </a:r>
+          </a:p>
+        </p:txBody>
+      </p:sp>
+      <p:sp>
+        <p:nvSpPr>
+          <p:cNvPr id="42" name="TextBox 41"/>
+          <p:cNvSpPr txBox="1"/>
+          <p:nvPr/>
+        </p:nvSpPr>
+        <p:spPr>
+          <a:xfrm>
+            <a:off x="8821674" y="6291072"/>
+            <a:ext cx="2635758" cy="256032"/>
+          </a:xfrm>
+          <a:prstGeom prst="rect">
+            <a:avLst/>
+          </a:prstGeom>
+          <a:noFill/>
+        </p:spPr>
+        <p:txBody>
+          <a:bodyPr wrap="square" lIns="0" rIns="0" tIns="0" bIns="0">
+            <a:spAutoFit/>
+          </a:bodyPr>
+          <a:lstStyle/>
+          <a:p>
+            <a:pPr algn="ctr"/>
+            <a:r>
+              <a:rPr sz="900" b="0" i="0">
+                <a:solidFill>
+                  <a:srgbClr val="B0A0D0"/>
+                </a:solidFill>
+              </a:rPr>
+              <a:t>Jammer detect &amp; blacklist</a:t>
             </a:r>
           </a:p>
         </p:txBody>
@@ -10336,7 +10325,7 @@
                   <a:srgbClr val="A060FF"/>
                 </a:solidFill>
               </a:rPr>
-              <a:t>CRITERIA 6  |  TEAM PRESENTATION &amp; Q&amp;A  |  2 MARKS</a:t>
+              <a:t>CRITERIA 5  |  PROJECT PLANNING &amp; MILESTONES  |  2 MARKS</a:t>
             </a:r>
           </a:p>
         </p:txBody>
@@ -10370,7 +10359,7 @@
                   <a:srgbClr val="FFFFFF"/>
                 </a:solidFill>
               </a:rPr>
-              <a:t>Work Breakdown &amp; Technical Defense Preparation</a:t>
+              <a:t>Development Timeline &amp; Phase Completion</a:t>
             </a:r>
           </a:p>
         </p:txBody>
@@ -10404,7 +10393,7 @@
                   <a:srgbClr val="B0A0D0"/>
                 </a:solidFill>
               </a:rPr>
-              <a:t>Clear engineering ownership and answers ready for viva evaluation</a:t>
+              <a:t>Structured engineering phases from literature survey through final empirical validation</a:t>
             </a:r>
           </a:p>
         </p:txBody>
@@ -10418,7 +10407,7 @@
         <p:spPr>
           <a:xfrm>
             <a:off x="640080" y="1572768"/>
-            <a:ext cx="5303520" cy="4160520"/>
+            <a:ext cx="10908792" cy="4480560"/>
           </a:xfrm>
           <a:prstGeom prst="rect">
             <a:avLst/>
@@ -10456,48 +10445,159 @@
       </p:sp>
       <p:sp>
         <p:nvSpPr>
-          <p:cNvPr id="8" name="TextBox 7"/>
-          <p:cNvSpPr txBox="1"/>
-          <p:nvPr/>
-        </p:nvSpPr>
-        <p:spPr>
-          <a:xfrm>
-            <a:off x="804672" y="1664208"/>
-            <a:ext cx="4974336" cy="237744"/>
-          </a:xfrm>
-          <a:prstGeom prst="rect">
-            <a:avLst/>
-          </a:prstGeom>
-          <a:noFill/>
-        </p:spPr>
-        <p:txBody>
-          <a:bodyPr wrap="square" lIns="0" rIns="0" tIns="0" bIns="0">
-            <a:spAutoFit/>
-          </a:bodyPr>
-          <a:lstStyle/>
-          <a:p>
-            <a:pPr algn="l"/>
-            <a:r>
-              <a:rPr sz="1100" b="1" i="0">
-                <a:solidFill>
-                  <a:srgbClr val="38BDF8"/>
-                </a:solidFill>
-              </a:rPr>
-              <a:t>Team Work Breakdown</a:t>
-            </a:r>
-          </a:p>
-        </p:txBody>
-      </p:sp>
-      <p:sp>
-        <p:nvSpPr>
-          <p:cNvPr id="9" name="Rectangle 8"/>
+          <p:cNvPr id="8" name="Rectangle 7"/>
           <p:cNvSpPr/>
           <p:nvPr/>
         </p:nvSpPr>
         <p:spPr>
           <a:xfrm>
-            <a:off x="804672" y="1938528"/>
-            <a:ext cx="4974336" cy="9525"/>
+            <a:off x="9692640" y="1773936"/>
+            <a:ext cx="822960" cy="182880"/>
+          </a:xfrm>
+          <a:prstGeom prst="rect">
+            <a:avLst/>
+          </a:prstGeom>
+          <a:solidFill>
+            <a:srgbClr val="1A5C3A"/>
+          </a:solidFill>
+          <a:ln>
+            <a:noFill/>
+          </a:ln>
+        </p:spPr>
+        <p:style>
+          <a:lnRef idx="1">
+            <a:schemeClr val="accent1"/>
+          </a:lnRef>
+          <a:fillRef idx="3">
+            <a:schemeClr val="accent1"/>
+          </a:fillRef>
+          <a:effectRef idx="2">
+            <a:schemeClr val="accent1"/>
+          </a:effectRef>
+          <a:fontRef idx="minor">
+            <a:schemeClr val="lt1"/>
+          </a:fontRef>
+        </p:style>
+        <p:txBody>
+          <a:bodyPr rtlCol="0" anchor="ctr"/>
+          <a:lstStyle/>
+          <a:p>
+            <a:pPr algn="ctr"/>
+          </a:p>
+        </p:txBody>
+      </p:sp>
+      <p:sp>
+        <p:nvSpPr>
+          <p:cNvPr id="9" name="TextBox 8"/>
+          <p:cNvSpPr txBox="1"/>
+          <p:nvPr/>
+        </p:nvSpPr>
+        <p:spPr>
+          <a:xfrm>
+            <a:off x="9692640" y="1755648"/>
+            <a:ext cx="822960" cy="201168"/>
+          </a:xfrm>
+          <a:prstGeom prst="rect">
+            <a:avLst/>
+          </a:prstGeom>
+          <a:noFill/>
+        </p:spPr>
+        <p:txBody>
+          <a:bodyPr wrap="square" lIns="0" rIns="0" tIns="0" bIns="0">
+            <a:spAutoFit/>
+          </a:bodyPr>
+          <a:lstStyle/>
+          <a:p>
+            <a:pPr algn="ctr"/>
+            <a:r>
+              <a:rPr sz="800" b="1" i="0">
+                <a:solidFill>
+                  <a:srgbClr val="34D399"/>
+                </a:solidFill>
+              </a:rPr>
+              <a:t>Complete</a:t>
+            </a:r>
+          </a:p>
+        </p:txBody>
+      </p:sp>
+      <p:sp>
+        <p:nvSpPr>
+          <p:cNvPr id="10" name="TextBox 9"/>
+          <p:cNvSpPr txBox="1"/>
+          <p:nvPr/>
+        </p:nvSpPr>
+        <p:spPr>
+          <a:xfrm>
+            <a:off x="822960" y="1755648"/>
+            <a:ext cx="8686800" cy="201168"/>
+          </a:xfrm>
+          <a:prstGeom prst="rect">
+            <a:avLst/>
+          </a:prstGeom>
+          <a:noFill/>
+        </p:spPr>
+        <p:txBody>
+          <a:bodyPr wrap="square" lIns="0" rIns="0" tIns="0" bIns="0">
+            <a:spAutoFit/>
+          </a:bodyPr>
+          <a:lstStyle/>
+          <a:p>
+            <a:pPr algn="l"/>
+            <a:r>
+              <a:rPr sz="1000" b="1" i="0">
+                <a:solidFill>
+                  <a:srgbClr val="FFFFFF"/>
+                </a:solidFill>
+              </a:rPr>
+              <a:t>Phase 1 -- Literature Survey &amp; Threat Modelling</a:t>
+            </a:r>
+          </a:p>
+        </p:txBody>
+      </p:sp>
+      <p:sp>
+        <p:nvSpPr>
+          <p:cNvPr id="11" name="TextBox 10"/>
+          <p:cNvSpPr txBox="1"/>
+          <p:nvPr/>
+        </p:nvSpPr>
+        <p:spPr>
+          <a:xfrm>
+            <a:off x="896112" y="2011680"/>
+            <a:ext cx="9601200" cy="384048"/>
+          </a:xfrm>
+          <a:prstGeom prst="rect">
+            <a:avLst/>
+          </a:prstGeom>
+          <a:noFill/>
+        </p:spPr>
+        <p:txBody>
+          <a:bodyPr wrap="square" lIns="0" rIns="0" tIns="0" bIns="0">
+            <a:spAutoFit/>
+          </a:bodyPr>
+          <a:lstStyle/>
+          <a:p>
+            <a:pPr algn="l"/>
+            <a:r>
+              <a:rPr sz="900" b="0" i="0">
+                <a:solidFill>
+                  <a:srgbClr val="B0A0D0"/>
+                </a:solidFill>
+              </a:rPr>
+              <a:t>Surveyed 100+ IEEE/ACM papers across FHSS, blacklisting, DTN, and game theory. Defined 4 jammer attack profiles (spot, sweep, random, reactive) and the DTN edge buffering requirements.</a:t>
+            </a:r>
+          </a:p>
+        </p:txBody>
+      </p:sp>
+      <p:sp>
+        <p:nvSpPr>
+          <p:cNvPr id="12" name="Rectangle 11"/>
+          <p:cNvSpPr/>
+          <p:nvPr/>
+        </p:nvSpPr>
+        <p:spPr>
+          <a:xfrm>
+            <a:off x="822960" y="2523744"/>
+            <a:ext cx="9784080" cy="9525"/>
           </a:xfrm>
           <a:prstGeom prst="rect">
             <a:avLst/>
@@ -10533,297 +10633,23 @@
       </p:sp>
       <p:sp>
         <p:nvSpPr>
-          <p:cNvPr id="10" name="TextBox 9"/>
-          <p:cNvSpPr txBox="1"/>
-          <p:nvPr/>
-        </p:nvSpPr>
-        <p:spPr>
-          <a:xfrm>
-            <a:off x="804672" y="2029968"/>
-            <a:ext cx="4974336" cy="201168"/>
-          </a:xfrm>
-          <a:prstGeom prst="rect">
-            <a:avLst/>
-          </a:prstGeom>
-          <a:noFill/>
-        </p:spPr>
-        <p:txBody>
-          <a:bodyPr wrap="square" lIns="0" rIns="0" tIns="0" bIns="0">
-            <a:spAutoFit/>
-          </a:bodyPr>
-          <a:lstStyle/>
-          <a:p>
-            <a:pPr algn="l"/>
-            <a:r>
-              <a:rPr sz="950" b="1" i="0">
-                <a:solidFill>
-                  <a:srgbClr val="FFFFFF"/>
-                </a:solidFill>
-              </a:rPr>
-              <a:t>  RF Protocol &amp; Firmware</a:t>
-            </a:r>
-          </a:p>
-        </p:txBody>
-      </p:sp>
-      <p:sp>
-        <p:nvSpPr>
-          <p:cNvPr id="11" name="TextBox 10"/>
-          <p:cNvSpPr txBox="1"/>
-          <p:nvPr/>
-        </p:nvSpPr>
-        <p:spPr>
-          <a:xfrm>
-            <a:off x="877824" y="2240280"/>
-            <a:ext cx="4828032" cy="384048"/>
-          </a:xfrm>
-          <a:prstGeom prst="rect">
-            <a:avLst/>
-          </a:prstGeom>
-          <a:noFill/>
-        </p:spPr>
-        <p:txBody>
-          <a:bodyPr wrap="square" lIns="0" rIns="0" tIns="0" bIns="0">
-            <a:spAutoFit/>
-          </a:bodyPr>
-          <a:lstStyle/>
-          <a:p>
-            <a:pPr algn="l"/>
-            <a:r>
-              <a:rPr sz="880" b="0" i="0">
-                <a:solidFill>
-                  <a:srgbClr val="B0A0D0"/>
-                </a:solidFill>
-              </a:rPr>
-              <a:t>Slotted 25 ms FHSS timing engine, XORShift32 PRNG, CRC-8 frame structure, FreeRTOS Core 1 SPI driver.</a:t>
-            </a:r>
-          </a:p>
-        </p:txBody>
-      </p:sp>
-      <p:sp>
-        <p:nvSpPr>
-          <p:cNvPr id="12" name="TextBox 11"/>
-          <p:cNvSpPr txBox="1"/>
-          <p:nvPr/>
-        </p:nvSpPr>
-        <p:spPr>
-          <a:xfrm>
-            <a:off x="804672" y="2715768"/>
-            <a:ext cx="4974336" cy="201168"/>
-          </a:xfrm>
-          <a:prstGeom prst="rect">
-            <a:avLst/>
-          </a:prstGeom>
-          <a:noFill/>
-        </p:spPr>
-        <p:txBody>
-          <a:bodyPr wrap="square" lIns="0" rIns="0" tIns="0" bIns="0">
-            <a:spAutoFit/>
-          </a:bodyPr>
-          <a:lstStyle/>
-          <a:p>
-            <a:pPr algn="l"/>
-            <a:r>
-              <a:rPr sz="950" b="1" i="0">
-                <a:solidFill>
-                  <a:srgbClr val="FFFFFF"/>
-                </a:solidFill>
-              </a:rPr>
-              <a:t>  Embedded Hardware</a:t>
-            </a:r>
-          </a:p>
-        </p:txBody>
-      </p:sp>
-      <p:sp>
-        <p:nvSpPr>
-          <p:cNvPr id="13" name="TextBox 12"/>
-          <p:cNvSpPr txBox="1"/>
-          <p:nvPr/>
-        </p:nvSpPr>
-        <p:spPr>
-          <a:xfrm>
-            <a:off x="877824" y="2926080"/>
-            <a:ext cx="4828032" cy="384048"/>
-          </a:xfrm>
-          <a:prstGeom prst="rect">
-            <a:avLst/>
-          </a:prstGeom>
-          <a:noFill/>
-        </p:spPr>
-        <p:txBody>
-          <a:bodyPr wrap="square" lIns="0" rIns="0" tIns="0" bIns="0">
-            <a:spAutoFit/>
-          </a:bodyPr>
-          <a:lstStyle/>
-          <a:p>
-            <a:pPr algn="l"/>
-            <a:r>
-              <a:rPr sz="880" b="0" i="0">
-                <a:solidFill>
-                  <a:srgbClr val="B0A0D0"/>
-                </a:solidFill>
-              </a:rPr>
-              <a:t>Node assembly, SPI signal routing, decoupling capacitor placement, 16x2 LCD wiring, and jammer touchscreen integration.</a:t>
-            </a:r>
-          </a:p>
-        </p:txBody>
-      </p:sp>
-      <p:sp>
-        <p:nvSpPr>
-          <p:cNvPr id="14" name="TextBox 13"/>
-          <p:cNvSpPr txBox="1"/>
-          <p:nvPr/>
-        </p:nvSpPr>
-        <p:spPr>
-          <a:xfrm>
-            <a:off x="804672" y="3401568"/>
-            <a:ext cx="4974336" cy="201168"/>
-          </a:xfrm>
-          <a:prstGeom prst="rect">
-            <a:avLst/>
-          </a:prstGeom>
-          <a:noFill/>
-        </p:spPr>
-        <p:txBody>
-          <a:bodyPr wrap="square" lIns="0" rIns="0" tIns="0" bIns="0">
-            <a:spAutoFit/>
-          </a:bodyPr>
-          <a:lstStyle/>
-          <a:p>
-            <a:pPr algn="l"/>
-            <a:r>
-              <a:rPr sz="950" b="1" i="0">
-                <a:solidFill>
-                  <a:srgbClr val="FFFFFF"/>
-                </a:solidFill>
-              </a:rPr>
-              <a:t>  Cloud &amp; Full-Stack</a:t>
-            </a:r>
-          </a:p>
-        </p:txBody>
-      </p:sp>
-      <p:sp>
-        <p:nvSpPr>
-          <p:cNvPr id="15" name="TextBox 14"/>
-          <p:cNvSpPr txBox="1"/>
-          <p:nvPr/>
-        </p:nvSpPr>
-        <p:spPr>
-          <a:xfrm>
-            <a:off x="877824" y="3611880"/>
-            <a:ext cx="4828032" cy="384048"/>
-          </a:xfrm>
-          <a:prstGeom prst="rect">
-            <a:avLst/>
-          </a:prstGeom>
-          <a:noFill/>
-        </p:spPr>
-        <p:txBody>
-          <a:bodyPr wrap="square" lIns="0" rIns="0" tIns="0" bIns="0">
-            <a:spAutoFit/>
-          </a:bodyPr>
-          <a:lstStyle/>
-          <a:p>
-            <a:pPr algn="l"/>
-            <a:r>
-              <a:rPr sz="880" b="0" i="0">
-                <a:solidFill>
-                  <a:srgbClr val="B0A0D0"/>
-                </a:solidFill>
-              </a:rPr>
-              <a:t>Supabase database schema, REST API polling logic, WebSocket telemetry stream, HTML5 spectrum heatmap.</a:t>
-            </a:r>
-          </a:p>
-        </p:txBody>
-      </p:sp>
-      <p:sp>
-        <p:nvSpPr>
-          <p:cNvPr id="16" name="TextBox 15"/>
-          <p:cNvSpPr txBox="1"/>
-          <p:nvPr/>
-        </p:nvSpPr>
-        <p:spPr>
-          <a:xfrm>
-            <a:off x="804672" y="4087368"/>
-            <a:ext cx="4974336" cy="201168"/>
-          </a:xfrm>
-          <a:prstGeom prst="rect">
-            <a:avLst/>
-          </a:prstGeom>
-          <a:noFill/>
-        </p:spPr>
-        <p:txBody>
-          <a:bodyPr wrap="square" lIns="0" rIns="0" tIns="0" bIns="0">
-            <a:spAutoFit/>
-          </a:bodyPr>
-          <a:lstStyle/>
-          <a:p>
-            <a:pPr algn="l"/>
-            <a:r>
-              <a:rPr sz="950" b="1" i="0">
-                <a:solidFill>
-                  <a:srgbClr val="FFFFFF"/>
-                </a:solidFill>
-              </a:rPr>
-              <a:t>  RF Modelling &amp; Testing</a:t>
-            </a:r>
-          </a:p>
-        </p:txBody>
-      </p:sp>
-      <p:sp>
-        <p:nvSpPr>
-          <p:cNvPr id="17" name="TextBox 16"/>
-          <p:cNvSpPr txBox="1"/>
-          <p:nvPr/>
-        </p:nvSpPr>
-        <p:spPr>
-          <a:xfrm>
-            <a:off x="877824" y="4297680"/>
-            <a:ext cx="4828032" cy="384048"/>
-          </a:xfrm>
-          <a:prstGeom prst="rect">
-            <a:avLst/>
-          </a:prstGeom>
-          <a:noFill/>
-        </p:spPr>
-        <p:txBody>
-          <a:bodyPr wrap="square" lIns="0" rIns="0" tIns="0" bIns="0">
-            <a:spAutoFit/>
-          </a:bodyPr>
-          <a:lstStyle/>
-          <a:p>
-            <a:pPr algn="l"/>
-            <a:r>
-              <a:rPr sz="880" b="0" i="0">
-                <a:solidFill>
-                  <a:srgbClr val="B0A0D0"/>
-                </a:solidFill>
-              </a:rPr>
-              <a:t>Ansys HFSS 2.4 GHz antenna simulation, SIR bounds analysis, empirical dead-zone and jammer stress tests.</a:t>
-            </a:r>
-          </a:p>
-        </p:txBody>
-      </p:sp>
-      <p:sp>
-        <p:nvSpPr>
-          <p:cNvPr id="18" name="Rectangle 17"/>
+          <p:cNvPr id="13" name="Rectangle 12"/>
           <p:cNvSpPr/>
           <p:nvPr/>
         </p:nvSpPr>
         <p:spPr>
           <a:xfrm>
-            <a:off x="6199632" y="1572768"/>
-            <a:ext cx="5349240" cy="4160520"/>
+            <a:off x="9692640" y="2615184"/>
+            <a:ext cx="822960" cy="182880"/>
           </a:xfrm>
           <a:prstGeom prst="rect">
             <a:avLst/>
           </a:prstGeom>
           <a:solidFill>
-            <a:srgbClr val="2A145E"/>
+            <a:srgbClr val="1A5C3A"/>
           </a:solidFill>
-          <a:ln w="7620">
-            <a:solidFill>
-              <a:srgbClr val="503090"/>
-            </a:solidFill>
+          <a:ln>
+            <a:noFill/>
           </a:ln>
         </p:spPr>
         <p:style>
@@ -10850,48 +10676,116 @@
       </p:sp>
       <p:sp>
         <p:nvSpPr>
-          <p:cNvPr id="19" name="TextBox 18"/>
-          <p:cNvSpPr txBox="1"/>
-          <p:nvPr/>
-        </p:nvSpPr>
-        <p:spPr>
-          <a:xfrm>
-            <a:off x="6364224" y="1664208"/>
-            <a:ext cx="5020056" cy="237744"/>
-          </a:xfrm>
-          <a:prstGeom prst="rect">
-            <a:avLst/>
-          </a:prstGeom>
-          <a:noFill/>
-        </p:spPr>
-        <p:txBody>
-          <a:bodyPr wrap="square" lIns="0" rIns="0" tIns="0" bIns="0">
-            <a:spAutoFit/>
-          </a:bodyPr>
-          <a:lstStyle/>
-          <a:p>
-            <a:pPr algn="l"/>
-            <a:r>
-              <a:rPr sz="1100" b="1" i="0">
-                <a:solidFill>
-                  <a:srgbClr val="FBBF24"/>
-                </a:solidFill>
-              </a:rPr>
-              <a:t>Anticipated Viva Questions</a:t>
-            </a:r>
-          </a:p>
-        </p:txBody>
-      </p:sp>
-      <p:sp>
-        <p:nvSpPr>
-          <p:cNvPr id="20" name="Rectangle 19"/>
+          <p:cNvPr id="14" name="TextBox 13"/>
+          <p:cNvSpPr txBox="1"/>
+          <p:nvPr/>
+        </p:nvSpPr>
+        <p:spPr>
+          <a:xfrm>
+            <a:off x="9692640" y="2596896"/>
+            <a:ext cx="822960" cy="201168"/>
+          </a:xfrm>
+          <a:prstGeom prst="rect">
+            <a:avLst/>
+          </a:prstGeom>
+          <a:noFill/>
+        </p:spPr>
+        <p:txBody>
+          <a:bodyPr wrap="square" lIns="0" rIns="0" tIns="0" bIns="0">
+            <a:spAutoFit/>
+          </a:bodyPr>
+          <a:lstStyle/>
+          <a:p>
+            <a:pPr algn="ctr"/>
+            <a:r>
+              <a:rPr sz="800" b="1" i="0">
+                <a:solidFill>
+                  <a:srgbClr val="34D399"/>
+                </a:solidFill>
+              </a:rPr>
+              <a:t>Complete</a:t>
+            </a:r>
+          </a:p>
+        </p:txBody>
+      </p:sp>
+      <p:sp>
+        <p:nvSpPr>
+          <p:cNvPr id="15" name="TextBox 14"/>
+          <p:cNvSpPr txBox="1"/>
+          <p:nvPr/>
+        </p:nvSpPr>
+        <p:spPr>
+          <a:xfrm>
+            <a:off x="822960" y="2596896"/>
+            <a:ext cx="8686800" cy="201168"/>
+          </a:xfrm>
+          <a:prstGeom prst="rect">
+            <a:avLst/>
+          </a:prstGeom>
+          <a:noFill/>
+        </p:spPr>
+        <p:txBody>
+          <a:bodyPr wrap="square" lIns="0" rIns="0" tIns="0" bIns="0">
+            <a:spAutoFit/>
+          </a:bodyPr>
+          <a:lstStyle/>
+          <a:p>
+            <a:pPr algn="l"/>
+            <a:r>
+              <a:rPr sz="1000" b="1" i="0">
+                <a:solidFill>
+                  <a:srgbClr val="FFFFFF"/>
+                </a:solidFill>
+              </a:rPr>
+              <a:t>Phase 2 -- Protocol Design &amp; Mathematical Models</a:t>
+            </a:r>
+          </a:p>
+        </p:txBody>
+      </p:sp>
+      <p:sp>
+        <p:nvSpPr>
+          <p:cNvPr id="16" name="TextBox 15"/>
+          <p:cNvSpPr txBox="1"/>
+          <p:nvPr/>
+        </p:nvSpPr>
+        <p:spPr>
+          <a:xfrm>
+            <a:off x="896112" y="2852928"/>
+            <a:ext cx="9601200" cy="384048"/>
+          </a:xfrm>
+          <a:prstGeom prst="rect">
+            <a:avLst/>
+          </a:prstGeom>
+          <a:noFill/>
+        </p:spPr>
+        <p:txBody>
+          <a:bodyPr wrap="square" lIns="0" rIns="0" tIns="0" bIns="0">
+            <a:spAutoFit/>
+          </a:bodyPr>
+          <a:lstStyle/>
+          <a:p>
+            <a:pPr algn="l"/>
+            <a:r>
+              <a:rPr sz="900" b="0" i="0">
+                <a:solidFill>
+                  <a:srgbClr val="B0A0D0"/>
+                </a:solidFill>
+              </a:rPr>
+              <a:t>Designed 25 ms slotted frame structure with 6 sub-phases. Developed XORShift32 PRNG for deterministic lockstep hopping. Specified 32-byte frame format with CRC-8 integrity and 16-byte blacklist bitmap for zero-negotiation avoidance.</a:t>
+            </a:r>
+          </a:p>
+        </p:txBody>
+      </p:sp>
+      <p:sp>
+        <p:nvSpPr>
+          <p:cNvPr id="17" name="Rectangle 16"/>
           <p:cNvSpPr/>
           <p:nvPr/>
         </p:nvSpPr>
         <p:spPr>
           <a:xfrm>
-            <a:off x="6364224" y="1938528"/>
-            <a:ext cx="5020056" cy="9525"/>
+            <a:off x="822960" y="3364992"/>
+            <a:ext cx="9784080" cy="9525"/>
           </a:xfrm>
           <a:prstGeom prst="rect">
             <a:avLst/>
@@ -10927,229 +10821,23 @@
       </p:sp>
       <p:sp>
         <p:nvSpPr>
-          <p:cNvPr id="21" name="TextBox 20"/>
-          <p:cNvSpPr txBox="1"/>
-          <p:nvPr/>
-        </p:nvSpPr>
-        <p:spPr>
-          <a:xfrm>
-            <a:off x="6364224" y="2029968"/>
-            <a:ext cx="5020056" cy="201168"/>
-          </a:xfrm>
-          <a:prstGeom prst="rect">
-            <a:avLst/>
-          </a:prstGeom>
-          <a:noFill/>
-        </p:spPr>
-        <p:txBody>
-          <a:bodyPr wrap="square" lIns="0" rIns="0" tIns="0" bIns="0">
-            <a:spAutoFit/>
-          </a:bodyPr>
-          <a:lstStyle/>
-          <a:p>
-            <a:pPr algn="l"/>
-            <a:r>
-              <a:rPr sz="950" b="1" i="0">
-                <a:solidFill>
-                  <a:srgbClr val="A060FF"/>
-                </a:solidFill>
-              </a:rPr>
-              <a:t>Q: What if a jammer corrupts the SYNC beacon?</a:t>
-            </a:r>
-          </a:p>
-        </p:txBody>
-      </p:sp>
-      <p:sp>
-        <p:nvSpPr>
-          <p:cNvPr id="22" name="TextBox 21"/>
-          <p:cNvSpPr txBox="1"/>
-          <p:nvPr/>
-        </p:nvSpPr>
-        <p:spPr>
-          <a:xfrm>
-            <a:off x="6437376" y="2249424"/>
-            <a:ext cx="4846320" cy="530352"/>
-          </a:xfrm>
-          <a:prstGeom prst="rect">
-            <a:avLst/>
-          </a:prstGeom>
-          <a:noFill/>
-        </p:spPr>
-        <p:txBody>
-          <a:bodyPr wrap="square" lIns="0" rIns="0" tIns="0" bIns="0">
-            <a:spAutoFit/>
-          </a:bodyPr>
-          <a:lstStyle/>
-          <a:p>
-            <a:pPr algn="l"/>
-            <a:r>
-              <a:rPr sz="880" b="0" i="0">
-                <a:solidFill>
-                  <a:srgbClr val="B0A0D0"/>
-                </a:solidFill>
-              </a:rPr>
-              <a:t>The flywheel clock continues hopping on the PRNG trajectory for 40 consecutive hops without a beacon. Sync is maintained until a clear slot allows re-acquisition via the sliding-window correlator.</a:t>
-            </a:r>
-          </a:p>
-        </p:txBody>
-      </p:sp>
-      <p:sp>
-        <p:nvSpPr>
-          <p:cNvPr id="23" name="TextBox 22"/>
-          <p:cNvSpPr txBox="1"/>
-          <p:nvPr/>
-        </p:nvSpPr>
-        <p:spPr>
-          <a:xfrm>
-            <a:off x="6364224" y="2907792"/>
-            <a:ext cx="5020056" cy="201168"/>
-          </a:xfrm>
-          <a:prstGeom prst="rect">
-            <a:avLst/>
-          </a:prstGeom>
-          <a:noFill/>
-        </p:spPr>
-        <p:txBody>
-          <a:bodyPr wrap="square" lIns="0" rIns="0" tIns="0" bIns="0">
-            <a:spAutoFit/>
-          </a:bodyPr>
-          <a:lstStyle/>
-          <a:p>
-            <a:pPr algn="l"/>
-            <a:r>
-              <a:rPr sz="950" b="1" i="0">
-                <a:solidFill>
-                  <a:srgbClr val="A060FF"/>
-                </a:solidFill>
-              </a:rPr>
-              <a:t>Q: How does Node B avoid overflow during extended dead zones?</a:t>
-            </a:r>
-          </a:p>
-        </p:txBody>
-      </p:sp>
-      <p:sp>
-        <p:nvSpPr>
-          <p:cNvPr id="24" name="TextBox 23"/>
-          <p:cNvSpPr txBox="1"/>
-          <p:nvPr/>
-        </p:nvSpPr>
-        <p:spPr>
-          <a:xfrm>
-            <a:off x="6437376" y="3127248"/>
-            <a:ext cx="4846320" cy="530352"/>
-          </a:xfrm>
-          <a:prstGeom prst="rect">
-            <a:avLst/>
-          </a:prstGeom>
-          <a:noFill/>
-        </p:spPr>
-        <p:txBody>
-          <a:bodyPr wrap="square" lIns="0" rIns="0" tIns="0" bIns="0">
-            <a:spAutoFit/>
-          </a:bodyPr>
-          <a:lstStyle/>
-          <a:p>
-            <a:pPr algn="l"/>
-            <a:r>
-              <a:rPr sz="880" b="0" i="0">
-                <a:solidFill>
-                  <a:srgbClr val="B0A0D0"/>
-                </a:solidFill>
-              </a:rPr>
-              <a:t>Priority queueing (emergency triage first) backed by dual SRAM + SPIFFS non-volatile flash paging. Supports thousands of packets before any eviction is required.</a:t>
-            </a:r>
-          </a:p>
-        </p:txBody>
-      </p:sp>
-      <p:sp>
-        <p:nvSpPr>
-          <p:cNvPr id="25" name="TextBox 24"/>
-          <p:cNvSpPr txBox="1"/>
-          <p:nvPr/>
-        </p:nvSpPr>
-        <p:spPr>
-          <a:xfrm>
-            <a:off x="6364224" y="3785616"/>
-            <a:ext cx="5020056" cy="201168"/>
-          </a:xfrm>
-          <a:prstGeom prst="rect">
-            <a:avLst/>
-          </a:prstGeom>
-          <a:noFill/>
-        </p:spPr>
-        <p:txBody>
-          <a:bodyPr wrap="square" lIns="0" rIns="0" tIns="0" bIns="0">
-            <a:spAutoFit/>
-          </a:bodyPr>
-          <a:lstStyle/>
-          <a:p>
-            <a:pPr algn="l"/>
-            <a:r>
-              <a:rPr sz="950" b="1" i="0">
-                <a:solidFill>
-                  <a:srgbClr val="A060FF"/>
-                </a:solidFill>
-              </a:rPr>
-              <a:t>Q: What stops a 124-channel sweep jammer from winning?</a:t>
-            </a:r>
-          </a:p>
-        </p:txBody>
-      </p:sp>
-      <p:sp>
-        <p:nvSpPr>
-          <p:cNvPr id="26" name="TextBox 25"/>
-          <p:cNvSpPr txBox="1"/>
-          <p:nvPr/>
-        </p:nvSpPr>
-        <p:spPr>
-          <a:xfrm>
-            <a:off x="6437376" y="4005072"/>
-            <a:ext cx="4846320" cy="530352"/>
-          </a:xfrm>
-          <a:prstGeom prst="rect">
-            <a:avLst/>
-          </a:prstGeom>
-          <a:noFill/>
-        </p:spPr>
-        <p:txBody>
-          <a:bodyPr wrap="square" lIns="0" rIns="0" tIns="0" bIns="0">
-            <a:spAutoFit/>
-          </a:bodyPr>
-          <a:lstStyle/>
-          <a:p>
-            <a:pPr algn="l"/>
-            <a:r>
-              <a:rPr sz="880" b="0" i="0">
-                <a:solidFill>
-                  <a:srgbClr val="B0A0D0"/>
-                </a:solidFill>
-              </a:rPr>
-              <a:t>A sweep jammer's per-channel dwell is &lt;1 ms. Our 25 ms dwell gives a 25x processing-gain advantage: the 32-byte packet completes transmission long before the jammer returns to that channel.</a:t>
-            </a:r>
-          </a:p>
-        </p:txBody>
-      </p:sp>
-      <p:sp>
-        <p:nvSpPr>
-          <p:cNvPr id="27" name="Rectangle 26"/>
+          <p:cNvPr id="18" name="Rectangle 17"/>
           <p:cNvSpPr/>
           <p:nvPr/>
         </p:nvSpPr>
         <p:spPr>
           <a:xfrm>
-            <a:off x="640080" y="5870448"/>
-            <a:ext cx="10908792" cy="658368"/>
+            <a:off x="9692640" y="3456432"/>
+            <a:ext cx="822960" cy="182880"/>
           </a:xfrm>
           <a:prstGeom prst="rect">
             <a:avLst/>
           </a:prstGeom>
           <a:solidFill>
-            <a:srgbClr val="2A145E"/>
+            <a:srgbClr val="1A5C3A"/>
           </a:solidFill>
-          <a:ln w="7620">
-            <a:solidFill>
-              <a:srgbClr val="503090"/>
-            </a:solidFill>
+          <a:ln>
+            <a:noFill/>
           </a:ln>
         </p:spPr>
         <p:style>
@@ -11176,34 +10864,478 @@
       </p:sp>
       <p:sp>
         <p:nvSpPr>
-          <p:cNvPr id="28" name="TextBox 27"/>
-          <p:cNvSpPr txBox="1"/>
-          <p:nvPr/>
-        </p:nvSpPr>
-        <p:spPr>
-          <a:xfrm>
-            <a:off x="822960" y="5943600"/>
-            <a:ext cx="10515600" cy="512064"/>
-          </a:xfrm>
-          <a:prstGeom prst="rect">
-            <a:avLst/>
-          </a:prstGeom>
-          <a:noFill/>
-        </p:spPr>
-        <p:txBody>
-          <a:bodyPr wrap="square" lIns="0" rIns="0" tIns="0" bIns="0">
-            <a:spAutoFit/>
-          </a:bodyPr>
-          <a:lstStyle/>
-          <a:p>
-            <a:pPr algn="l"/>
-            <a:r>
-              <a:rPr sz="1000" b="0" i="0">
+          <p:cNvPr id="19" name="TextBox 18"/>
+          <p:cNvSpPr txBox="1"/>
+          <p:nvPr/>
+        </p:nvSpPr>
+        <p:spPr>
+          <a:xfrm>
+            <a:off x="9692640" y="3438144"/>
+            <a:ext cx="822960" cy="201168"/>
+          </a:xfrm>
+          <a:prstGeom prst="rect">
+            <a:avLst/>
+          </a:prstGeom>
+          <a:noFill/>
+        </p:spPr>
+        <p:txBody>
+          <a:bodyPr wrap="square" lIns="0" rIns="0" tIns="0" bIns="0">
+            <a:spAutoFit/>
+          </a:bodyPr>
+          <a:lstStyle/>
+          <a:p>
+            <a:pPr algn="ctr"/>
+            <a:r>
+              <a:rPr sz="800" b="1" i="0">
+                <a:solidFill>
+                  <a:srgbClr val="34D399"/>
+                </a:solidFill>
+              </a:rPr>
+              <a:t>Complete</a:t>
+            </a:r>
+          </a:p>
+        </p:txBody>
+      </p:sp>
+      <p:sp>
+        <p:nvSpPr>
+          <p:cNvPr id="20" name="TextBox 19"/>
+          <p:cNvSpPr txBox="1"/>
+          <p:nvPr/>
+        </p:nvSpPr>
+        <p:spPr>
+          <a:xfrm>
+            <a:off x="822960" y="3438144"/>
+            <a:ext cx="8686800" cy="201168"/>
+          </a:xfrm>
+          <a:prstGeom prst="rect">
+            <a:avLst/>
+          </a:prstGeom>
+          <a:noFill/>
+        </p:spPr>
+        <p:txBody>
+          <a:bodyPr wrap="square" lIns="0" rIns="0" tIns="0" bIns="0">
+            <a:spAutoFit/>
+          </a:bodyPr>
+          <a:lstStyle/>
+          <a:p>
+            <a:pPr algn="l"/>
+            <a:r>
+              <a:rPr sz="1000" b="1" i="0">
+                <a:solidFill>
+                  <a:srgbClr val="FFFFFF"/>
+                </a:solidFill>
+              </a:rPr>
+              <a:t>Phase 3 -- Firmware Development &amp; Hardware Assembly</a:t>
+            </a:r>
+          </a:p>
+        </p:txBody>
+      </p:sp>
+      <p:sp>
+        <p:nvSpPr>
+          <p:cNvPr id="21" name="TextBox 20"/>
+          <p:cNvSpPr txBox="1"/>
+          <p:nvPr/>
+        </p:nvSpPr>
+        <p:spPr>
+          <a:xfrm>
+            <a:off x="896112" y="3694176"/>
+            <a:ext cx="9601200" cy="384048"/>
+          </a:xfrm>
+          <a:prstGeom prst="rect">
+            <a:avLst/>
+          </a:prstGeom>
+          <a:noFill/>
+        </p:spPr>
+        <p:txBody>
+          <a:bodyPr wrap="square" lIns="0" rIns="0" tIns="0" bIns="0">
+            <a:spAutoFit/>
+          </a:bodyPr>
+          <a:lstStyle/>
+          <a:p>
+            <a:pPr algn="l"/>
+            <a:r>
+              <a:rPr sz="900" b="0" i="0">
                 <a:solidFill>
                   <a:srgbClr val="B0A0D0"/>
                 </a:solidFill>
               </a:rPr>
-              <a:t>All team members can explain theoretical derivations, firmware register operations, and execute the live hardware demonstration end-to-end.</a:t>
+              <a:t>Wrote all node firmware in C/C++. Assembled 3 ESP32 nodes with nRF24L01+ transceivers and SPI bus. Built Arduino Mega jammer console with 3.5" TFT touchscreen. Verified clean compilation across all targets.</a:t>
+            </a:r>
+          </a:p>
+        </p:txBody>
+      </p:sp>
+      <p:sp>
+        <p:nvSpPr>
+          <p:cNvPr id="22" name="Rectangle 21"/>
+          <p:cNvSpPr/>
+          <p:nvPr/>
+        </p:nvSpPr>
+        <p:spPr>
+          <a:xfrm>
+            <a:off x="822960" y="4206240"/>
+            <a:ext cx="9784080" cy="9525"/>
+          </a:xfrm>
+          <a:prstGeom prst="rect">
+            <a:avLst/>
+          </a:prstGeom>
+          <a:solidFill>
+            <a:srgbClr val="503090"/>
+          </a:solidFill>
+          <a:ln>
+            <a:noFill/>
+          </a:ln>
+        </p:spPr>
+        <p:style>
+          <a:lnRef idx="1">
+            <a:schemeClr val="accent1"/>
+          </a:lnRef>
+          <a:fillRef idx="3">
+            <a:schemeClr val="accent1"/>
+          </a:fillRef>
+          <a:effectRef idx="2">
+            <a:schemeClr val="accent1"/>
+          </a:effectRef>
+          <a:fontRef idx="minor">
+            <a:schemeClr val="lt1"/>
+          </a:fontRef>
+        </p:style>
+        <p:txBody>
+          <a:bodyPr rtlCol="0" anchor="ctr"/>
+          <a:lstStyle/>
+          <a:p>
+            <a:pPr algn="ctr"/>
+          </a:p>
+        </p:txBody>
+      </p:sp>
+      <p:sp>
+        <p:nvSpPr>
+          <p:cNvPr id="23" name="Rectangle 22"/>
+          <p:cNvSpPr/>
+          <p:nvPr/>
+        </p:nvSpPr>
+        <p:spPr>
+          <a:xfrm>
+            <a:off x="9692640" y="4297680"/>
+            <a:ext cx="822960" cy="182880"/>
+          </a:xfrm>
+          <a:prstGeom prst="rect">
+            <a:avLst/>
+          </a:prstGeom>
+          <a:solidFill>
+            <a:srgbClr val="1A5C3A"/>
+          </a:solidFill>
+          <a:ln>
+            <a:noFill/>
+          </a:ln>
+        </p:spPr>
+        <p:style>
+          <a:lnRef idx="1">
+            <a:schemeClr val="accent1"/>
+          </a:lnRef>
+          <a:fillRef idx="3">
+            <a:schemeClr val="accent1"/>
+          </a:fillRef>
+          <a:effectRef idx="2">
+            <a:schemeClr val="accent1"/>
+          </a:effectRef>
+          <a:fontRef idx="minor">
+            <a:schemeClr val="lt1"/>
+          </a:fontRef>
+        </p:style>
+        <p:txBody>
+          <a:bodyPr rtlCol="0" anchor="ctr"/>
+          <a:lstStyle/>
+          <a:p>
+            <a:pPr algn="ctr"/>
+          </a:p>
+        </p:txBody>
+      </p:sp>
+      <p:sp>
+        <p:nvSpPr>
+          <p:cNvPr id="24" name="TextBox 23"/>
+          <p:cNvSpPr txBox="1"/>
+          <p:nvPr/>
+        </p:nvSpPr>
+        <p:spPr>
+          <a:xfrm>
+            <a:off x="9692640" y="4279392"/>
+            <a:ext cx="822960" cy="201168"/>
+          </a:xfrm>
+          <a:prstGeom prst="rect">
+            <a:avLst/>
+          </a:prstGeom>
+          <a:noFill/>
+        </p:spPr>
+        <p:txBody>
+          <a:bodyPr wrap="square" lIns="0" rIns="0" tIns="0" bIns="0">
+            <a:spAutoFit/>
+          </a:bodyPr>
+          <a:lstStyle/>
+          <a:p>
+            <a:pPr algn="ctr"/>
+            <a:r>
+              <a:rPr sz="800" b="1" i="0">
+                <a:solidFill>
+                  <a:srgbClr val="34D399"/>
+                </a:solidFill>
+              </a:rPr>
+              <a:t>Complete</a:t>
+            </a:r>
+          </a:p>
+        </p:txBody>
+      </p:sp>
+      <p:sp>
+        <p:nvSpPr>
+          <p:cNvPr id="25" name="TextBox 24"/>
+          <p:cNvSpPr txBox="1"/>
+          <p:nvPr/>
+        </p:nvSpPr>
+        <p:spPr>
+          <a:xfrm>
+            <a:off x="822960" y="4279392"/>
+            <a:ext cx="8686800" cy="201168"/>
+          </a:xfrm>
+          <a:prstGeom prst="rect">
+            <a:avLst/>
+          </a:prstGeom>
+          <a:noFill/>
+        </p:spPr>
+        <p:txBody>
+          <a:bodyPr wrap="square" lIns="0" rIns="0" tIns="0" bIns="0">
+            <a:spAutoFit/>
+          </a:bodyPr>
+          <a:lstStyle/>
+          <a:p>
+            <a:pPr algn="l"/>
+            <a:r>
+              <a:rPr sz="1000" b="1" i="0">
+                <a:solidFill>
+                  <a:srgbClr val="FFFFFF"/>
+                </a:solidFill>
+              </a:rPr>
+              <a:t>Phase 4 -- Cloud Backend &amp; Web Dashboard</a:t>
+            </a:r>
+          </a:p>
+        </p:txBody>
+      </p:sp>
+      <p:sp>
+        <p:nvSpPr>
+          <p:cNvPr id="26" name="TextBox 25"/>
+          <p:cNvSpPr txBox="1"/>
+          <p:nvPr/>
+        </p:nvSpPr>
+        <p:spPr>
+          <a:xfrm>
+            <a:off x="896112" y="4535424"/>
+            <a:ext cx="9601200" cy="384048"/>
+          </a:xfrm>
+          <a:prstGeom prst="rect">
+            <a:avLst/>
+          </a:prstGeom>
+          <a:noFill/>
+        </p:spPr>
+        <p:txBody>
+          <a:bodyPr wrap="square" lIns="0" rIns="0" tIns="0" bIns="0">
+            <a:spAutoFit/>
+          </a:bodyPr>
+          <a:lstStyle/>
+          <a:p>
+            <a:pPr algn="l"/>
+            <a:r>
+              <a:rPr sz="900" b="0" i="0">
+                <a:solidFill>
+                  <a:srgbClr val="B0A0D0"/>
+                </a:solidFill>
+              </a:rPr>
+              <a:t>Configured Supabase PostgreSQL with 4 relational tables. Implemented REST API polling on ESP32 nodes. Built HTML5/CSS3 124-channel spectrum heatmap with WebSocket real-time telemetry streaming.</a:t>
+            </a:r>
+          </a:p>
+        </p:txBody>
+      </p:sp>
+      <p:sp>
+        <p:nvSpPr>
+          <p:cNvPr id="27" name="Rectangle 26"/>
+          <p:cNvSpPr/>
+          <p:nvPr/>
+        </p:nvSpPr>
+        <p:spPr>
+          <a:xfrm>
+            <a:off x="822960" y="5047488"/>
+            <a:ext cx="9784080" cy="9525"/>
+          </a:xfrm>
+          <a:prstGeom prst="rect">
+            <a:avLst/>
+          </a:prstGeom>
+          <a:solidFill>
+            <a:srgbClr val="503090"/>
+          </a:solidFill>
+          <a:ln>
+            <a:noFill/>
+          </a:ln>
+        </p:spPr>
+        <p:style>
+          <a:lnRef idx="1">
+            <a:schemeClr val="accent1"/>
+          </a:lnRef>
+          <a:fillRef idx="3">
+            <a:schemeClr val="accent1"/>
+          </a:fillRef>
+          <a:effectRef idx="2">
+            <a:schemeClr val="accent1"/>
+          </a:effectRef>
+          <a:fontRef idx="minor">
+            <a:schemeClr val="lt1"/>
+          </a:fontRef>
+        </p:style>
+        <p:txBody>
+          <a:bodyPr rtlCol="0" anchor="ctr"/>
+          <a:lstStyle/>
+          <a:p>
+            <a:pPr algn="ctr"/>
+          </a:p>
+        </p:txBody>
+      </p:sp>
+      <p:sp>
+        <p:nvSpPr>
+          <p:cNvPr id="28" name="Rectangle 27"/>
+          <p:cNvSpPr/>
+          <p:nvPr/>
+        </p:nvSpPr>
+        <p:spPr>
+          <a:xfrm>
+            <a:off x="9692640" y="5138928"/>
+            <a:ext cx="822960" cy="182880"/>
+          </a:xfrm>
+          <a:prstGeom prst="rect">
+            <a:avLst/>
+          </a:prstGeom>
+          <a:solidFill>
+            <a:srgbClr val="1A5C3A"/>
+          </a:solidFill>
+          <a:ln>
+            <a:noFill/>
+          </a:ln>
+        </p:spPr>
+        <p:style>
+          <a:lnRef idx="1">
+            <a:schemeClr val="accent1"/>
+          </a:lnRef>
+          <a:fillRef idx="3">
+            <a:schemeClr val="accent1"/>
+          </a:fillRef>
+          <a:effectRef idx="2">
+            <a:schemeClr val="accent1"/>
+          </a:effectRef>
+          <a:fontRef idx="minor">
+            <a:schemeClr val="lt1"/>
+          </a:fontRef>
+        </p:style>
+        <p:txBody>
+          <a:bodyPr rtlCol="0" anchor="ctr"/>
+          <a:lstStyle/>
+          <a:p>
+            <a:pPr algn="ctr"/>
+          </a:p>
+        </p:txBody>
+      </p:sp>
+      <p:sp>
+        <p:nvSpPr>
+          <p:cNvPr id="29" name="TextBox 28"/>
+          <p:cNvSpPr txBox="1"/>
+          <p:nvPr/>
+        </p:nvSpPr>
+        <p:spPr>
+          <a:xfrm>
+            <a:off x="9692640" y="5120640"/>
+            <a:ext cx="822960" cy="201168"/>
+          </a:xfrm>
+          <a:prstGeom prst="rect">
+            <a:avLst/>
+          </a:prstGeom>
+          <a:noFill/>
+        </p:spPr>
+        <p:txBody>
+          <a:bodyPr wrap="square" lIns="0" rIns="0" tIns="0" bIns="0">
+            <a:spAutoFit/>
+          </a:bodyPr>
+          <a:lstStyle/>
+          <a:p>
+            <a:pPr algn="ctr"/>
+            <a:r>
+              <a:rPr sz="800" b="1" i="0">
+                <a:solidFill>
+                  <a:srgbClr val="34D399"/>
+                </a:solidFill>
+              </a:rPr>
+              <a:t>Complete</a:t>
+            </a:r>
+          </a:p>
+        </p:txBody>
+      </p:sp>
+      <p:sp>
+        <p:nvSpPr>
+          <p:cNvPr id="30" name="TextBox 29"/>
+          <p:cNvSpPr txBox="1"/>
+          <p:nvPr/>
+        </p:nvSpPr>
+        <p:spPr>
+          <a:xfrm>
+            <a:off x="822960" y="5120640"/>
+            <a:ext cx="8686800" cy="201168"/>
+          </a:xfrm>
+          <a:prstGeom prst="rect">
+            <a:avLst/>
+          </a:prstGeom>
+          <a:noFill/>
+        </p:spPr>
+        <p:txBody>
+          <a:bodyPr wrap="square" lIns="0" rIns="0" tIns="0" bIns="0">
+            <a:spAutoFit/>
+          </a:bodyPr>
+          <a:lstStyle/>
+          <a:p>
+            <a:pPr algn="l"/>
+            <a:r>
+              <a:rPr sz="1000" b="1" i="0">
+                <a:solidFill>
+                  <a:srgbClr val="FFFFFF"/>
+                </a:solidFill>
+              </a:rPr>
+              <a:t>Phase 5 -- RF Simulation &amp; Empirical Validation</a:t>
+            </a:r>
+          </a:p>
+        </p:txBody>
+      </p:sp>
+      <p:sp>
+        <p:nvSpPr>
+          <p:cNvPr id="31" name="TextBox 30"/>
+          <p:cNvSpPr txBox="1"/>
+          <p:nvPr/>
+        </p:nvSpPr>
+        <p:spPr>
+          <a:xfrm>
+            <a:off x="896112" y="5376672"/>
+            <a:ext cx="9601200" cy="384048"/>
+          </a:xfrm>
+          <a:prstGeom prst="rect">
+            <a:avLst/>
+          </a:prstGeom>
+          <a:noFill/>
+        </p:spPr>
+        <p:txBody>
+          <a:bodyPr wrap="square" lIns="0" rIns="0" tIns="0" bIns="0">
+            <a:spAutoFit/>
+          </a:bodyPr>
+          <a:lstStyle/>
+          <a:p>
+            <a:pPr algn="l"/>
+            <a:r>
+              <a:rPr sz="900" b="0" i="0">
+                <a:solidFill>
+                  <a:srgbClr val="B0A0D0"/>
+                </a:solidFill>
+              </a:rPr>
+              <a:t>Ran Ansys HFSS antenna simulation at 2.45 GHz. Executed all 4 live test scenarios. Measured: sync acquisition 380 ms, dead-zone loss 0.00%, jammer blacklist in 1 hop.</a:t>
             </a:r>
           </a:p>
         </p:txBody>
@@ -11217,6 +11349,1011 @@
 </file>
 
 <file path=ppt/slides/slide15.xml><?xml version="1.0" encoding="utf-8"?>
+<p:sld xmlns:a="http://schemas.openxmlformats.org/drawingml/2006/main" xmlns:p="http://schemas.openxmlformats.org/presentationml/2006/main" xmlns:r="http://schemas.openxmlformats.org/officeDocument/2006/relationships">
+  <p:cSld>
+    <p:spTree>
+      <p:nvGrpSpPr>
+        <p:cNvPr id="1" name=""/>
+        <p:cNvGrpSpPr/>
+        <p:nvPr/>
+      </p:nvGrpSpPr>
+      <p:grpSpPr/>
+      <p:sp>
+        <p:nvSpPr>
+          <p:cNvPr id="2" name="Rectangle 1"/>
+          <p:cNvSpPr/>
+          <p:nvPr/>
+        </p:nvSpPr>
+        <p:spPr>
+          <a:xfrm>
+            <a:off x="0" y="0"/>
+            <a:ext cx="12191695" cy="6858000"/>
+          </a:xfrm>
+          <a:prstGeom prst="rect">
+            <a:avLst/>
+          </a:prstGeom>
+          <a:solidFill>
+            <a:srgbClr val="1A0A3C"/>
+          </a:solidFill>
+          <a:ln>
+            <a:noFill/>
+          </a:ln>
+        </p:spPr>
+        <p:style>
+          <a:lnRef idx="1">
+            <a:schemeClr val="accent1"/>
+          </a:lnRef>
+          <a:fillRef idx="3">
+            <a:schemeClr val="accent1"/>
+          </a:fillRef>
+          <a:effectRef idx="2">
+            <a:schemeClr val="accent1"/>
+          </a:effectRef>
+          <a:fontRef idx="minor">
+            <a:schemeClr val="lt1"/>
+          </a:fontRef>
+        </p:style>
+        <p:txBody>
+          <a:bodyPr rtlCol="0" anchor="ctr"/>
+          <a:lstStyle/>
+          <a:p>
+            <a:pPr algn="ctr"/>
+          </a:p>
+        </p:txBody>
+      </p:sp>
+      <p:sp>
+        <p:nvSpPr>
+          <p:cNvPr id="3" name="Rectangle 2"/>
+          <p:cNvSpPr/>
+          <p:nvPr/>
+        </p:nvSpPr>
+        <p:spPr>
+          <a:xfrm>
+            <a:off x="640080" y="438912"/>
+            <a:ext cx="10908792" cy="31750"/>
+          </a:xfrm>
+          <a:prstGeom prst="rect">
+            <a:avLst/>
+          </a:prstGeom>
+          <a:solidFill>
+            <a:srgbClr val="A060FF"/>
+          </a:solidFill>
+          <a:ln>
+            <a:noFill/>
+          </a:ln>
+        </p:spPr>
+        <p:style>
+          <a:lnRef idx="1">
+            <a:schemeClr val="accent1"/>
+          </a:lnRef>
+          <a:fillRef idx="3">
+            <a:schemeClr val="accent1"/>
+          </a:fillRef>
+          <a:effectRef idx="2">
+            <a:schemeClr val="accent1"/>
+          </a:effectRef>
+          <a:fontRef idx="minor">
+            <a:schemeClr val="lt1"/>
+          </a:fontRef>
+        </p:style>
+        <p:txBody>
+          <a:bodyPr rtlCol="0" anchor="ctr"/>
+          <a:lstStyle/>
+          <a:p>
+            <a:pPr algn="ctr"/>
+          </a:p>
+        </p:txBody>
+      </p:sp>
+      <p:sp>
+        <p:nvSpPr>
+          <p:cNvPr id="4" name="TextBox 3"/>
+          <p:cNvSpPr txBox="1"/>
+          <p:nvPr/>
+        </p:nvSpPr>
+        <p:spPr>
+          <a:xfrm>
+            <a:off x="640080" y="137160"/>
+            <a:ext cx="10908792" cy="320040"/>
+          </a:xfrm>
+          <a:prstGeom prst="rect">
+            <a:avLst/>
+          </a:prstGeom>
+          <a:noFill/>
+        </p:spPr>
+        <p:txBody>
+          <a:bodyPr wrap="square" lIns="0" rIns="0" tIns="0" bIns="0">
+            <a:spAutoFit/>
+          </a:bodyPr>
+          <a:lstStyle/>
+          <a:p>
+            <a:pPr algn="l"/>
+            <a:r>
+              <a:rPr sz="950" b="1" i="0">
+                <a:solidFill>
+                  <a:srgbClr val="A060FF"/>
+                </a:solidFill>
+              </a:rPr>
+              <a:t>CRITERIA 6  |  TEAM PRESENTATION &amp; Q&amp;A  |  2 MARKS</a:t>
+            </a:r>
+          </a:p>
+        </p:txBody>
+      </p:sp>
+      <p:sp>
+        <p:nvSpPr>
+          <p:cNvPr id="5" name="TextBox 4"/>
+          <p:cNvSpPr txBox="1"/>
+          <p:nvPr/>
+        </p:nvSpPr>
+        <p:spPr>
+          <a:xfrm>
+            <a:off x="640080" y="512064"/>
+            <a:ext cx="10908792" cy="658368"/>
+          </a:xfrm>
+          <a:prstGeom prst="rect">
+            <a:avLst/>
+          </a:prstGeom>
+          <a:noFill/>
+        </p:spPr>
+        <p:txBody>
+          <a:bodyPr wrap="square" lIns="0" rIns="0" tIns="0" bIns="0">
+            <a:spAutoFit/>
+          </a:bodyPr>
+          <a:lstStyle/>
+          <a:p>
+            <a:pPr algn="l"/>
+            <a:r>
+              <a:rPr sz="2200" b="1" i="0">
+                <a:solidFill>
+                  <a:srgbClr val="FFFFFF"/>
+                </a:solidFill>
+              </a:rPr>
+              <a:t>Work Breakdown &amp; Technical Defense Preparation</a:t>
+            </a:r>
+          </a:p>
+        </p:txBody>
+      </p:sp>
+      <p:sp>
+        <p:nvSpPr>
+          <p:cNvPr id="6" name="TextBox 5"/>
+          <p:cNvSpPr txBox="1"/>
+          <p:nvPr/>
+        </p:nvSpPr>
+        <p:spPr>
+          <a:xfrm>
+            <a:off x="640080" y="1143000"/>
+            <a:ext cx="10908792" cy="365760"/>
+          </a:xfrm>
+          <a:prstGeom prst="rect">
+            <a:avLst/>
+          </a:prstGeom>
+          <a:noFill/>
+        </p:spPr>
+        <p:txBody>
+          <a:bodyPr wrap="square" lIns="0" rIns="0" tIns="0" bIns="0">
+            <a:spAutoFit/>
+          </a:bodyPr>
+          <a:lstStyle/>
+          <a:p>
+            <a:pPr algn="l"/>
+            <a:r>
+              <a:rPr sz="1100" b="0" i="0">
+                <a:solidFill>
+                  <a:srgbClr val="B0A0D0"/>
+                </a:solidFill>
+              </a:rPr>
+              <a:t>Clear engineering ownership and answers ready for viva evaluation</a:t>
+            </a:r>
+          </a:p>
+        </p:txBody>
+      </p:sp>
+      <p:sp>
+        <p:nvSpPr>
+          <p:cNvPr id="7" name="Rectangle 6"/>
+          <p:cNvSpPr/>
+          <p:nvPr/>
+        </p:nvSpPr>
+        <p:spPr>
+          <a:xfrm>
+            <a:off x="640080" y="1572768"/>
+            <a:ext cx="5303520" cy="4160520"/>
+          </a:xfrm>
+          <a:prstGeom prst="rect">
+            <a:avLst/>
+          </a:prstGeom>
+          <a:solidFill>
+            <a:srgbClr val="2A145E"/>
+          </a:solidFill>
+          <a:ln w="7620">
+            <a:solidFill>
+              <a:srgbClr val="503090"/>
+            </a:solidFill>
+          </a:ln>
+        </p:spPr>
+        <p:style>
+          <a:lnRef idx="1">
+            <a:schemeClr val="accent1"/>
+          </a:lnRef>
+          <a:fillRef idx="3">
+            <a:schemeClr val="accent1"/>
+          </a:fillRef>
+          <a:effectRef idx="2">
+            <a:schemeClr val="accent1"/>
+          </a:effectRef>
+          <a:fontRef idx="minor">
+            <a:schemeClr val="lt1"/>
+          </a:fontRef>
+        </p:style>
+        <p:txBody>
+          <a:bodyPr rtlCol="0" anchor="ctr"/>
+          <a:lstStyle/>
+          <a:p>
+            <a:pPr algn="ctr"/>
+          </a:p>
+        </p:txBody>
+      </p:sp>
+      <p:sp>
+        <p:nvSpPr>
+          <p:cNvPr id="8" name="TextBox 7"/>
+          <p:cNvSpPr txBox="1"/>
+          <p:nvPr/>
+        </p:nvSpPr>
+        <p:spPr>
+          <a:xfrm>
+            <a:off x="804672" y="1664208"/>
+            <a:ext cx="4974336" cy="237744"/>
+          </a:xfrm>
+          <a:prstGeom prst="rect">
+            <a:avLst/>
+          </a:prstGeom>
+          <a:noFill/>
+        </p:spPr>
+        <p:txBody>
+          <a:bodyPr wrap="square" lIns="0" rIns="0" tIns="0" bIns="0">
+            <a:spAutoFit/>
+          </a:bodyPr>
+          <a:lstStyle/>
+          <a:p>
+            <a:pPr algn="l"/>
+            <a:r>
+              <a:rPr sz="1100" b="1" i="0">
+                <a:solidFill>
+                  <a:srgbClr val="38BDF8"/>
+                </a:solidFill>
+              </a:rPr>
+              <a:t>Team Work Breakdown</a:t>
+            </a:r>
+          </a:p>
+        </p:txBody>
+      </p:sp>
+      <p:sp>
+        <p:nvSpPr>
+          <p:cNvPr id="9" name="Rectangle 8"/>
+          <p:cNvSpPr/>
+          <p:nvPr/>
+        </p:nvSpPr>
+        <p:spPr>
+          <a:xfrm>
+            <a:off x="804672" y="1938528"/>
+            <a:ext cx="4974336" cy="9525"/>
+          </a:xfrm>
+          <a:prstGeom prst="rect">
+            <a:avLst/>
+          </a:prstGeom>
+          <a:solidFill>
+            <a:srgbClr val="503090"/>
+          </a:solidFill>
+          <a:ln>
+            <a:noFill/>
+          </a:ln>
+        </p:spPr>
+        <p:style>
+          <a:lnRef idx="1">
+            <a:schemeClr val="accent1"/>
+          </a:lnRef>
+          <a:fillRef idx="3">
+            <a:schemeClr val="accent1"/>
+          </a:fillRef>
+          <a:effectRef idx="2">
+            <a:schemeClr val="accent1"/>
+          </a:effectRef>
+          <a:fontRef idx="minor">
+            <a:schemeClr val="lt1"/>
+          </a:fontRef>
+        </p:style>
+        <p:txBody>
+          <a:bodyPr rtlCol="0" anchor="ctr"/>
+          <a:lstStyle/>
+          <a:p>
+            <a:pPr algn="ctr"/>
+          </a:p>
+        </p:txBody>
+      </p:sp>
+      <p:sp>
+        <p:nvSpPr>
+          <p:cNvPr id="10" name="TextBox 9"/>
+          <p:cNvSpPr txBox="1"/>
+          <p:nvPr/>
+        </p:nvSpPr>
+        <p:spPr>
+          <a:xfrm>
+            <a:off x="804672" y="2029968"/>
+            <a:ext cx="4974336" cy="201168"/>
+          </a:xfrm>
+          <a:prstGeom prst="rect">
+            <a:avLst/>
+          </a:prstGeom>
+          <a:noFill/>
+        </p:spPr>
+        <p:txBody>
+          <a:bodyPr wrap="square" lIns="0" rIns="0" tIns="0" bIns="0">
+            <a:spAutoFit/>
+          </a:bodyPr>
+          <a:lstStyle/>
+          <a:p>
+            <a:pPr algn="l"/>
+            <a:r>
+              <a:rPr sz="950" b="1" i="0">
+                <a:solidFill>
+                  <a:srgbClr val="FFFFFF"/>
+                </a:solidFill>
+              </a:rPr>
+              <a:t>  RF Protocol &amp; Firmware</a:t>
+            </a:r>
+          </a:p>
+        </p:txBody>
+      </p:sp>
+      <p:sp>
+        <p:nvSpPr>
+          <p:cNvPr id="11" name="TextBox 10"/>
+          <p:cNvSpPr txBox="1"/>
+          <p:nvPr/>
+        </p:nvSpPr>
+        <p:spPr>
+          <a:xfrm>
+            <a:off x="877824" y="2240280"/>
+            <a:ext cx="4828032" cy="384048"/>
+          </a:xfrm>
+          <a:prstGeom prst="rect">
+            <a:avLst/>
+          </a:prstGeom>
+          <a:noFill/>
+        </p:spPr>
+        <p:txBody>
+          <a:bodyPr wrap="square" lIns="0" rIns="0" tIns="0" bIns="0">
+            <a:spAutoFit/>
+          </a:bodyPr>
+          <a:lstStyle/>
+          <a:p>
+            <a:pPr algn="l"/>
+            <a:r>
+              <a:rPr sz="880" b="0" i="0">
+                <a:solidFill>
+                  <a:srgbClr val="B0A0D0"/>
+                </a:solidFill>
+              </a:rPr>
+              <a:t>Slotted 25 ms FHSS timing engine, XORShift32 PRNG, CRC-8 frame structure, FreeRTOS Core 1 SPI driver.</a:t>
+            </a:r>
+          </a:p>
+        </p:txBody>
+      </p:sp>
+      <p:sp>
+        <p:nvSpPr>
+          <p:cNvPr id="12" name="TextBox 11"/>
+          <p:cNvSpPr txBox="1"/>
+          <p:nvPr/>
+        </p:nvSpPr>
+        <p:spPr>
+          <a:xfrm>
+            <a:off x="804672" y="2715768"/>
+            <a:ext cx="4974336" cy="201168"/>
+          </a:xfrm>
+          <a:prstGeom prst="rect">
+            <a:avLst/>
+          </a:prstGeom>
+          <a:noFill/>
+        </p:spPr>
+        <p:txBody>
+          <a:bodyPr wrap="square" lIns="0" rIns="0" tIns="0" bIns="0">
+            <a:spAutoFit/>
+          </a:bodyPr>
+          <a:lstStyle/>
+          <a:p>
+            <a:pPr algn="l"/>
+            <a:r>
+              <a:rPr sz="950" b="1" i="0">
+                <a:solidFill>
+                  <a:srgbClr val="FFFFFF"/>
+                </a:solidFill>
+              </a:rPr>
+              <a:t>  Embedded Hardware</a:t>
+            </a:r>
+          </a:p>
+        </p:txBody>
+      </p:sp>
+      <p:sp>
+        <p:nvSpPr>
+          <p:cNvPr id="13" name="TextBox 12"/>
+          <p:cNvSpPr txBox="1"/>
+          <p:nvPr/>
+        </p:nvSpPr>
+        <p:spPr>
+          <a:xfrm>
+            <a:off x="877824" y="2926080"/>
+            <a:ext cx="4828032" cy="384048"/>
+          </a:xfrm>
+          <a:prstGeom prst="rect">
+            <a:avLst/>
+          </a:prstGeom>
+          <a:noFill/>
+        </p:spPr>
+        <p:txBody>
+          <a:bodyPr wrap="square" lIns="0" rIns="0" tIns="0" bIns="0">
+            <a:spAutoFit/>
+          </a:bodyPr>
+          <a:lstStyle/>
+          <a:p>
+            <a:pPr algn="l"/>
+            <a:r>
+              <a:rPr sz="880" b="0" i="0">
+                <a:solidFill>
+                  <a:srgbClr val="B0A0D0"/>
+                </a:solidFill>
+              </a:rPr>
+              <a:t>Node assembly, SPI signal routing, decoupling capacitor placement, 16x2 LCD wiring, and jammer touchscreen integration.</a:t>
+            </a:r>
+          </a:p>
+        </p:txBody>
+      </p:sp>
+      <p:sp>
+        <p:nvSpPr>
+          <p:cNvPr id="14" name="TextBox 13"/>
+          <p:cNvSpPr txBox="1"/>
+          <p:nvPr/>
+        </p:nvSpPr>
+        <p:spPr>
+          <a:xfrm>
+            <a:off x="804672" y="3401568"/>
+            <a:ext cx="4974336" cy="201168"/>
+          </a:xfrm>
+          <a:prstGeom prst="rect">
+            <a:avLst/>
+          </a:prstGeom>
+          <a:noFill/>
+        </p:spPr>
+        <p:txBody>
+          <a:bodyPr wrap="square" lIns="0" rIns="0" tIns="0" bIns="0">
+            <a:spAutoFit/>
+          </a:bodyPr>
+          <a:lstStyle/>
+          <a:p>
+            <a:pPr algn="l"/>
+            <a:r>
+              <a:rPr sz="950" b="1" i="0">
+                <a:solidFill>
+                  <a:srgbClr val="FFFFFF"/>
+                </a:solidFill>
+              </a:rPr>
+              <a:t>  Cloud &amp; Full-Stack</a:t>
+            </a:r>
+          </a:p>
+        </p:txBody>
+      </p:sp>
+      <p:sp>
+        <p:nvSpPr>
+          <p:cNvPr id="15" name="TextBox 14"/>
+          <p:cNvSpPr txBox="1"/>
+          <p:nvPr/>
+        </p:nvSpPr>
+        <p:spPr>
+          <a:xfrm>
+            <a:off x="877824" y="3611880"/>
+            <a:ext cx="4828032" cy="384048"/>
+          </a:xfrm>
+          <a:prstGeom prst="rect">
+            <a:avLst/>
+          </a:prstGeom>
+          <a:noFill/>
+        </p:spPr>
+        <p:txBody>
+          <a:bodyPr wrap="square" lIns="0" rIns="0" tIns="0" bIns="0">
+            <a:spAutoFit/>
+          </a:bodyPr>
+          <a:lstStyle/>
+          <a:p>
+            <a:pPr algn="l"/>
+            <a:r>
+              <a:rPr sz="880" b="0" i="0">
+                <a:solidFill>
+                  <a:srgbClr val="B0A0D0"/>
+                </a:solidFill>
+              </a:rPr>
+              <a:t>Supabase database schema, REST API polling logic, WebSocket telemetry stream, HTML5 spectrum heatmap.</a:t>
+            </a:r>
+          </a:p>
+        </p:txBody>
+      </p:sp>
+      <p:sp>
+        <p:nvSpPr>
+          <p:cNvPr id="16" name="TextBox 15"/>
+          <p:cNvSpPr txBox="1"/>
+          <p:nvPr/>
+        </p:nvSpPr>
+        <p:spPr>
+          <a:xfrm>
+            <a:off x="804672" y="4087368"/>
+            <a:ext cx="4974336" cy="201168"/>
+          </a:xfrm>
+          <a:prstGeom prst="rect">
+            <a:avLst/>
+          </a:prstGeom>
+          <a:noFill/>
+        </p:spPr>
+        <p:txBody>
+          <a:bodyPr wrap="square" lIns="0" rIns="0" tIns="0" bIns="0">
+            <a:spAutoFit/>
+          </a:bodyPr>
+          <a:lstStyle/>
+          <a:p>
+            <a:pPr algn="l"/>
+            <a:r>
+              <a:rPr sz="950" b="1" i="0">
+                <a:solidFill>
+                  <a:srgbClr val="FFFFFF"/>
+                </a:solidFill>
+              </a:rPr>
+              <a:t>  RF Modelling &amp; Testing</a:t>
+            </a:r>
+          </a:p>
+        </p:txBody>
+      </p:sp>
+      <p:sp>
+        <p:nvSpPr>
+          <p:cNvPr id="17" name="TextBox 16"/>
+          <p:cNvSpPr txBox="1"/>
+          <p:nvPr/>
+        </p:nvSpPr>
+        <p:spPr>
+          <a:xfrm>
+            <a:off x="877824" y="4297680"/>
+            <a:ext cx="4828032" cy="384048"/>
+          </a:xfrm>
+          <a:prstGeom prst="rect">
+            <a:avLst/>
+          </a:prstGeom>
+          <a:noFill/>
+        </p:spPr>
+        <p:txBody>
+          <a:bodyPr wrap="square" lIns="0" rIns="0" tIns="0" bIns="0">
+            <a:spAutoFit/>
+          </a:bodyPr>
+          <a:lstStyle/>
+          <a:p>
+            <a:pPr algn="l"/>
+            <a:r>
+              <a:rPr sz="880" b="0" i="0">
+                <a:solidFill>
+                  <a:srgbClr val="B0A0D0"/>
+                </a:solidFill>
+              </a:rPr>
+              <a:t>Ansys HFSS 2.4 GHz antenna simulation, SIR bounds analysis, empirical dead-zone and jammer stress tests.</a:t>
+            </a:r>
+          </a:p>
+        </p:txBody>
+      </p:sp>
+      <p:sp>
+        <p:nvSpPr>
+          <p:cNvPr id="18" name="Rectangle 17"/>
+          <p:cNvSpPr/>
+          <p:nvPr/>
+        </p:nvSpPr>
+        <p:spPr>
+          <a:xfrm>
+            <a:off x="6199632" y="1572768"/>
+            <a:ext cx="5349240" cy="4160520"/>
+          </a:xfrm>
+          <a:prstGeom prst="rect">
+            <a:avLst/>
+          </a:prstGeom>
+          <a:solidFill>
+            <a:srgbClr val="2A145E"/>
+          </a:solidFill>
+          <a:ln w="7620">
+            <a:solidFill>
+              <a:srgbClr val="503090"/>
+            </a:solidFill>
+          </a:ln>
+        </p:spPr>
+        <p:style>
+          <a:lnRef idx="1">
+            <a:schemeClr val="accent1"/>
+          </a:lnRef>
+          <a:fillRef idx="3">
+            <a:schemeClr val="accent1"/>
+          </a:fillRef>
+          <a:effectRef idx="2">
+            <a:schemeClr val="accent1"/>
+          </a:effectRef>
+          <a:fontRef idx="minor">
+            <a:schemeClr val="lt1"/>
+          </a:fontRef>
+        </p:style>
+        <p:txBody>
+          <a:bodyPr rtlCol="0" anchor="ctr"/>
+          <a:lstStyle/>
+          <a:p>
+            <a:pPr algn="ctr"/>
+          </a:p>
+        </p:txBody>
+      </p:sp>
+      <p:sp>
+        <p:nvSpPr>
+          <p:cNvPr id="19" name="TextBox 18"/>
+          <p:cNvSpPr txBox="1"/>
+          <p:nvPr/>
+        </p:nvSpPr>
+        <p:spPr>
+          <a:xfrm>
+            <a:off x="6364224" y="1664208"/>
+            <a:ext cx="5020056" cy="237744"/>
+          </a:xfrm>
+          <a:prstGeom prst="rect">
+            <a:avLst/>
+          </a:prstGeom>
+          <a:noFill/>
+        </p:spPr>
+        <p:txBody>
+          <a:bodyPr wrap="square" lIns="0" rIns="0" tIns="0" bIns="0">
+            <a:spAutoFit/>
+          </a:bodyPr>
+          <a:lstStyle/>
+          <a:p>
+            <a:pPr algn="l"/>
+            <a:r>
+              <a:rPr sz="1100" b="1" i="0">
+                <a:solidFill>
+                  <a:srgbClr val="FBBF24"/>
+                </a:solidFill>
+              </a:rPr>
+              <a:t>Anticipated Viva Questions</a:t>
+            </a:r>
+          </a:p>
+        </p:txBody>
+      </p:sp>
+      <p:sp>
+        <p:nvSpPr>
+          <p:cNvPr id="20" name="Rectangle 19"/>
+          <p:cNvSpPr/>
+          <p:nvPr/>
+        </p:nvSpPr>
+        <p:spPr>
+          <a:xfrm>
+            <a:off x="6364224" y="1938528"/>
+            <a:ext cx="5020056" cy="9525"/>
+          </a:xfrm>
+          <a:prstGeom prst="rect">
+            <a:avLst/>
+          </a:prstGeom>
+          <a:solidFill>
+            <a:srgbClr val="503090"/>
+          </a:solidFill>
+          <a:ln>
+            <a:noFill/>
+          </a:ln>
+        </p:spPr>
+        <p:style>
+          <a:lnRef idx="1">
+            <a:schemeClr val="accent1"/>
+          </a:lnRef>
+          <a:fillRef idx="3">
+            <a:schemeClr val="accent1"/>
+          </a:fillRef>
+          <a:effectRef idx="2">
+            <a:schemeClr val="accent1"/>
+          </a:effectRef>
+          <a:fontRef idx="minor">
+            <a:schemeClr val="lt1"/>
+          </a:fontRef>
+        </p:style>
+        <p:txBody>
+          <a:bodyPr rtlCol="0" anchor="ctr"/>
+          <a:lstStyle/>
+          <a:p>
+            <a:pPr algn="ctr"/>
+          </a:p>
+        </p:txBody>
+      </p:sp>
+      <p:sp>
+        <p:nvSpPr>
+          <p:cNvPr id="21" name="TextBox 20"/>
+          <p:cNvSpPr txBox="1"/>
+          <p:nvPr/>
+        </p:nvSpPr>
+        <p:spPr>
+          <a:xfrm>
+            <a:off x="6364224" y="2029968"/>
+            <a:ext cx="5020056" cy="201168"/>
+          </a:xfrm>
+          <a:prstGeom prst="rect">
+            <a:avLst/>
+          </a:prstGeom>
+          <a:noFill/>
+        </p:spPr>
+        <p:txBody>
+          <a:bodyPr wrap="square" lIns="0" rIns="0" tIns="0" bIns="0">
+            <a:spAutoFit/>
+          </a:bodyPr>
+          <a:lstStyle/>
+          <a:p>
+            <a:pPr algn="l"/>
+            <a:r>
+              <a:rPr sz="950" b="1" i="0">
+                <a:solidFill>
+                  <a:srgbClr val="A060FF"/>
+                </a:solidFill>
+              </a:rPr>
+              <a:t>Q: What if a jammer corrupts the SYNC beacon?</a:t>
+            </a:r>
+          </a:p>
+        </p:txBody>
+      </p:sp>
+      <p:sp>
+        <p:nvSpPr>
+          <p:cNvPr id="22" name="TextBox 21"/>
+          <p:cNvSpPr txBox="1"/>
+          <p:nvPr/>
+        </p:nvSpPr>
+        <p:spPr>
+          <a:xfrm>
+            <a:off x="6437376" y="2249424"/>
+            <a:ext cx="4846320" cy="530352"/>
+          </a:xfrm>
+          <a:prstGeom prst="rect">
+            <a:avLst/>
+          </a:prstGeom>
+          <a:noFill/>
+        </p:spPr>
+        <p:txBody>
+          <a:bodyPr wrap="square" lIns="0" rIns="0" tIns="0" bIns="0">
+            <a:spAutoFit/>
+          </a:bodyPr>
+          <a:lstStyle/>
+          <a:p>
+            <a:pPr algn="l"/>
+            <a:r>
+              <a:rPr sz="880" b="0" i="0">
+                <a:solidFill>
+                  <a:srgbClr val="B0A0D0"/>
+                </a:solidFill>
+              </a:rPr>
+              <a:t>The flywheel clock continues hopping on the PRNG trajectory for 40 consecutive hops without a beacon. Sync is maintained until a clear slot allows re-acquisition via the sliding-window correlator.</a:t>
+            </a:r>
+          </a:p>
+        </p:txBody>
+      </p:sp>
+      <p:sp>
+        <p:nvSpPr>
+          <p:cNvPr id="23" name="TextBox 22"/>
+          <p:cNvSpPr txBox="1"/>
+          <p:nvPr/>
+        </p:nvSpPr>
+        <p:spPr>
+          <a:xfrm>
+            <a:off x="6364224" y="2907792"/>
+            <a:ext cx="5020056" cy="201168"/>
+          </a:xfrm>
+          <a:prstGeom prst="rect">
+            <a:avLst/>
+          </a:prstGeom>
+          <a:noFill/>
+        </p:spPr>
+        <p:txBody>
+          <a:bodyPr wrap="square" lIns="0" rIns="0" tIns="0" bIns="0">
+            <a:spAutoFit/>
+          </a:bodyPr>
+          <a:lstStyle/>
+          <a:p>
+            <a:pPr algn="l"/>
+            <a:r>
+              <a:rPr sz="950" b="1" i="0">
+                <a:solidFill>
+                  <a:srgbClr val="A060FF"/>
+                </a:solidFill>
+              </a:rPr>
+              <a:t>Q: How does Node B avoid overflow during extended dead zones?</a:t>
+            </a:r>
+          </a:p>
+        </p:txBody>
+      </p:sp>
+      <p:sp>
+        <p:nvSpPr>
+          <p:cNvPr id="24" name="TextBox 23"/>
+          <p:cNvSpPr txBox="1"/>
+          <p:nvPr/>
+        </p:nvSpPr>
+        <p:spPr>
+          <a:xfrm>
+            <a:off x="6437376" y="3127248"/>
+            <a:ext cx="4846320" cy="530352"/>
+          </a:xfrm>
+          <a:prstGeom prst="rect">
+            <a:avLst/>
+          </a:prstGeom>
+          <a:noFill/>
+        </p:spPr>
+        <p:txBody>
+          <a:bodyPr wrap="square" lIns="0" rIns="0" tIns="0" bIns="0">
+            <a:spAutoFit/>
+          </a:bodyPr>
+          <a:lstStyle/>
+          <a:p>
+            <a:pPr algn="l"/>
+            <a:r>
+              <a:rPr sz="880" b="0" i="0">
+                <a:solidFill>
+                  <a:srgbClr val="B0A0D0"/>
+                </a:solidFill>
+              </a:rPr>
+              <a:t>Priority queueing (emergency triage first) backed by dual SRAM + SPIFFS non-volatile flash paging. Supports thousands of packets before any eviction is required.</a:t>
+            </a:r>
+          </a:p>
+        </p:txBody>
+      </p:sp>
+      <p:sp>
+        <p:nvSpPr>
+          <p:cNvPr id="25" name="TextBox 24"/>
+          <p:cNvSpPr txBox="1"/>
+          <p:nvPr/>
+        </p:nvSpPr>
+        <p:spPr>
+          <a:xfrm>
+            <a:off x="6364224" y="3785616"/>
+            <a:ext cx="5020056" cy="201168"/>
+          </a:xfrm>
+          <a:prstGeom prst="rect">
+            <a:avLst/>
+          </a:prstGeom>
+          <a:noFill/>
+        </p:spPr>
+        <p:txBody>
+          <a:bodyPr wrap="square" lIns="0" rIns="0" tIns="0" bIns="0">
+            <a:spAutoFit/>
+          </a:bodyPr>
+          <a:lstStyle/>
+          <a:p>
+            <a:pPr algn="l"/>
+            <a:r>
+              <a:rPr sz="950" b="1" i="0">
+                <a:solidFill>
+                  <a:srgbClr val="A060FF"/>
+                </a:solidFill>
+              </a:rPr>
+              <a:t>Q: What stops a 124-channel sweep jammer from winning?</a:t>
+            </a:r>
+          </a:p>
+        </p:txBody>
+      </p:sp>
+      <p:sp>
+        <p:nvSpPr>
+          <p:cNvPr id="26" name="TextBox 25"/>
+          <p:cNvSpPr txBox="1"/>
+          <p:nvPr/>
+        </p:nvSpPr>
+        <p:spPr>
+          <a:xfrm>
+            <a:off x="6437376" y="4005072"/>
+            <a:ext cx="4846320" cy="530352"/>
+          </a:xfrm>
+          <a:prstGeom prst="rect">
+            <a:avLst/>
+          </a:prstGeom>
+          <a:noFill/>
+        </p:spPr>
+        <p:txBody>
+          <a:bodyPr wrap="square" lIns="0" rIns="0" tIns="0" bIns="0">
+            <a:spAutoFit/>
+          </a:bodyPr>
+          <a:lstStyle/>
+          <a:p>
+            <a:pPr algn="l"/>
+            <a:r>
+              <a:rPr sz="880" b="0" i="0">
+                <a:solidFill>
+                  <a:srgbClr val="B0A0D0"/>
+                </a:solidFill>
+              </a:rPr>
+              <a:t>A sweep jammer's per-channel dwell is &lt;1 ms. Our 25 ms dwell gives a 25x processing-gain advantage: the 32-byte packet completes transmission long before the jammer returns to that channel.</a:t>
+            </a:r>
+          </a:p>
+        </p:txBody>
+      </p:sp>
+      <p:sp>
+        <p:nvSpPr>
+          <p:cNvPr id="27" name="Rectangle 26"/>
+          <p:cNvSpPr/>
+          <p:nvPr/>
+        </p:nvSpPr>
+        <p:spPr>
+          <a:xfrm>
+            <a:off x="640080" y="5870448"/>
+            <a:ext cx="10908792" cy="658368"/>
+          </a:xfrm>
+          <a:prstGeom prst="rect">
+            <a:avLst/>
+          </a:prstGeom>
+          <a:solidFill>
+            <a:srgbClr val="2A145E"/>
+          </a:solidFill>
+          <a:ln w="7620">
+            <a:solidFill>
+              <a:srgbClr val="503090"/>
+            </a:solidFill>
+          </a:ln>
+        </p:spPr>
+        <p:style>
+          <a:lnRef idx="1">
+            <a:schemeClr val="accent1"/>
+          </a:lnRef>
+          <a:fillRef idx="3">
+            <a:schemeClr val="accent1"/>
+          </a:fillRef>
+          <a:effectRef idx="2">
+            <a:schemeClr val="accent1"/>
+          </a:effectRef>
+          <a:fontRef idx="minor">
+            <a:schemeClr val="lt1"/>
+          </a:fontRef>
+        </p:style>
+        <p:txBody>
+          <a:bodyPr rtlCol="0" anchor="ctr"/>
+          <a:lstStyle/>
+          <a:p>
+            <a:pPr algn="ctr"/>
+          </a:p>
+        </p:txBody>
+      </p:sp>
+      <p:sp>
+        <p:nvSpPr>
+          <p:cNvPr id="28" name="TextBox 27"/>
+          <p:cNvSpPr txBox="1"/>
+          <p:nvPr/>
+        </p:nvSpPr>
+        <p:spPr>
+          <a:xfrm>
+            <a:off x="822960" y="5943600"/>
+            <a:ext cx="10515600" cy="512064"/>
+          </a:xfrm>
+          <a:prstGeom prst="rect">
+            <a:avLst/>
+          </a:prstGeom>
+          <a:noFill/>
+        </p:spPr>
+        <p:txBody>
+          <a:bodyPr wrap="square" lIns="0" rIns="0" tIns="0" bIns="0">
+            <a:spAutoFit/>
+          </a:bodyPr>
+          <a:lstStyle/>
+          <a:p>
+            <a:pPr algn="l"/>
+            <a:r>
+              <a:rPr sz="1000" b="0" i="0">
+                <a:solidFill>
+                  <a:srgbClr val="B0A0D0"/>
+                </a:solidFill>
+              </a:rPr>
+              <a:t>All team members can explain theoretical derivations, firmware register operations, and execute the live hardware demonstration end-to-end.</a:t>
+            </a:r>
+          </a:p>
+        </p:txBody>
+      </p:sp>
+    </p:spTree>
+  </p:cSld>
+  <p:clrMapOvr>
+    <a:masterClrMapping/>
+  </p:clrMapOvr>
+</p:sld>
+</file>
+
+<file path=ppt/slides/slide16.xml><?xml version="1.0" encoding="utf-8"?>
 <p:sld xmlns:a="http://schemas.openxmlformats.org/drawingml/2006/main" xmlns:p="http://schemas.openxmlformats.org/presentationml/2006/main" xmlns:r="http://schemas.openxmlformats.org/officeDocument/2006/relationships">
   <p:cSld>
     <p:spTree>
